--- a/public/fun/pack/pptx/family/가족소개_07_아이와함께_뒷산진달래.pptx
+++ b/public/fun/pack/pptx/family/가족소개_07_아이와함께_뒷산진달래.pptx
@@ -3347,7 +3347,7 @@
             <a:r>
               <a:rPr sz="3600" b="1" i="0">
                 <a:solidFill>
-                  <a:srgbClr val="71285B"/>
+                  <a:srgbClr val="721D59"/>
                 </a:solidFill>
               </a:rPr>
               <a:t>우리 가족을 소개합니다</a:t>
@@ -3385,7 +3385,7 @@
             <a:r>
               <a:rPr sz="1700" b="0" i="1">
                 <a:solidFill>
-                  <a:srgbClr val="71285B"/>
+                  <a:srgbClr val="721D59"/>
                 </a:solidFill>
               </a:rPr>
               <a:t>뒷산 진달래 따러 간 아이들</a:t>
@@ -3472,7 +3472,7 @@
             <a:avLst/>
           </a:prstGeom>
           <a:solidFill>
-            <a:srgbClr val="F1D0E7"/>
+            <a:srgbClr val="F7D4ED"/>
           </a:solidFill>
           <a:ln>
             <a:noFill/>
@@ -3501,7 +3501,7 @@
             <a:avLst/>
           </a:prstGeom>
           <a:solidFill>
-            <a:srgbClr val="BD4298"/>
+            <a:srgbClr val="D345A9"/>
           </a:solidFill>
           <a:ln>
             <a:noFill/>
@@ -3545,7 +3545,7 @@
             <a:r>
               <a:rPr sz="3000" b="1" i="0">
                 <a:solidFill>
-                  <a:srgbClr val="71285B"/>
+                  <a:srgbClr val="721D59"/>
                 </a:solidFill>
               </a:rPr>
               <a:t>가족 구성원</a:t>
@@ -3568,11 +3568,11 @@
             <a:avLst/>
           </a:prstGeom>
           <a:solidFill>
-            <a:srgbClr val="F1D0E7"/>
+            <a:srgbClr val="F7D4ED"/>
           </a:solidFill>
           <a:ln w="19050">
             <a:solidFill>
-              <a:srgbClr val="BD4298"/>
+              <a:srgbClr val="D345A9"/>
             </a:solidFill>
             <a:prstDash val="dash"/>
           </a:ln>
@@ -3591,7 +3591,7 @@
             <a:r>
               <a:rPr sz="1200" b="0" i="0">
                 <a:solidFill>
-                  <a:srgbClr val="71285B"/>
+                  <a:srgbClr val="721D59"/>
                 </a:solidFill>
               </a:rPr>
               <a:t>사진</a:t>
@@ -3629,7 +3629,7 @@
             <a:r>
               <a:rPr sz="1600" b="1" i="0">
                 <a:solidFill>
-                  <a:srgbClr val="71285B"/>
+                  <a:srgbClr val="721D59"/>
                 </a:solidFill>
               </a:rPr>
               <a:t>아빠</a:t>
@@ -3720,11 +3720,11 @@
             <a:avLst/>
           </a:prstGeom>
           <a:solidFill>
-            <a:srgbClr val="F1D0E7"/>
+            <a:srgbClr val="F7D4ED"/>
           </a:solidFill>
           <a:ln w="19050">
             <a:solidFill>
-              <a:srgbClr val="BD4298"/>
+              <a:srgbClr val="D345A9"/>
             </a:solidFill>
             <a:prstDash val="dash"/>
           </a:ln>
@@ -3743,7 +3743,7 @@
             <a:r>
               <a:rPr sz="1200" b="0" i="0">
                 <a:solidFill>
-                  <a:srgbClr val="71285B"/>
+                  <a:srgbClr val="721D59"/>
                 </a:solidFill>
               </a:rPr>
               <a:t>사진</a:t>
@@ -3781,7 +3781,7 @@
             <a:r>
               <a:rPr sz="1600" b="1" i="0">
                 <a:solidFill>
-                  <a:srgbClr val="71285B"/>
+                  <a:srgbClr val="721D59"/>
                 </a:solidFill>
               </a:rPr>
               <a:t>엄마</a:t>
@@ -3872,11 +3872,11 @@
             <a:avLst/>
           </a:prstGeom>
           <a:solidFill>
-            <a:srgbClr val="F1D0E7"/>
+            <a:srgbClr val="F7D4ED"/>
           </a:solidFill>
           <a:ln w="19050">
             <a:solidFill>
-              <a:srgbClr val="BD4298"/>
+              <a:srgbClr val="D345A9"/>
             </a:solidFill>
             <a:prstDash val="dash"/>
           </a:ln>
@@ -3895,7 +3895,7 @@
             <a:r>
               <a:rPr sz="1200" b="0" i="0">
                 <a:solidFill>
-                  <a:srgbClr val="71285B"/>
+                  <a:srgbClr val="721D59"/>
                 </a:solidFill>
               </a:rPr>
               <a:t>사진</a:t>
@@ -3933,7 +3933,7 @@
             <a:r>
               <a:rPr sz="1600" b="1" i="0">
                 <a:solidFill>
-                  <a:srgbClr val="71285B"/>
+                  <a:srgbClr val="721D59"/>
                 </a:solidFill>
               </a:rPr>
               <a:t>첫째</a:t>
@@ -4024,11 +4024,11 @@
             <a:avLst/>
           </a:prstGeom>
           <a:solidFill>
-            <a:srgbClr val="F1D0E7"/>
+            <a:srgbClr val="F7D4ED"/>
           </a:solidFill>
           <a:ln w="19050">
             <a:solidFill>
-              <a:srgbClr val="BD4298"/>
+              <a:srgbClr val="D345A9"/>
             </a:solidFill>
             <a:prstDash val="dash"/>
           </a:ln>
@@ -4047,7 +4047,7 @@
             <a:r>
               <a:rPr sz="1200" b="0" i="0">
                 <a:solidFill>
-                  <a:srgbClr val="71285B"/>
+                  <a:srgbClr val="721D59"/>
                 </a:solidFill>
               </a:rPr>
               <a:t>사진</a:t>
@@ -4085,7 +4085,7 @@
             <a:r>
               <a:rPr sz="1600" b="1" i="0">
                 <a:solidFill>
-                  <a:srgbClr val="71285B"/>
+                  <a:srgbClr val="721D59"/>
                 </a:solidFill>
               </a:rPr>
               <a:t>둘째</a:t>
@@ -4202,7 +4202,7 @@
             <a:avLst/>
           </a:prstGeom>
           <a:solidFill>
-            <a:srgbClr val="F1D0E7"/>
+            <a:srgbClr val="F7D4ED"/>
           </a:solidFill>
           <a:ln>
             <a:noFill/>
@@ -4231,7 +4231,7 @@
             <a:avLst/>
           </a:prstGeom>
           <a:solidFill>
-            <a:srgbClr val="BD4298"/>
+            <a:srgbClr val="D345A9"/>
           </a:solidFill>
           <a:ln>
             <a:noFill/>
@@ -4275,7 +4275,7 @@
             <a:r>
               <a:rPr sz="3000" b="1" i="0">
                 <a:solidFill>
-                  <a:srgbClr val="71285B"/>
+                  <a:srgbClr val="721D59"/>
                 </a:solidFill>
               </a:rPr>
               <a:t>우리 가족 이야기</a:t>
@@ -4298,7 +4298,7 @@
             <a:avLst/>
           </a:prstGeom>
           <a:solidFill>
-            <a:srgbClr val="F1D0E7"/>
+            <a:srgbClr val="F7D4ED"/>
           </a:solidFill>
           <a:ln>
             <a:noFill/>
@@ -4327,7 +4327,7 @@
             <a:avLst/>
           </a:prstGeom>
           <a:solidFill>
-            <a:srgbClr val="BD4298"/>
+            <a:srgbClr val="D345A9"/>
           </a:solidFill>
           <a:ln w="38100">
             <a:solidFill>
@@ -4373,7 +4373,7 @@
             <a:r>
               <a:rPr sz="1600" b="1" i="0">
                 <a:solidFill>
-                  <a:srgbClr val="BD4298"/>
+                  <a:srgbClr val="D345A9"/>
                 </a:solidFill>
               </a:rPr>
               <a:t>가족이 된 날</a:t>
@@ -4411,7 +4411,7 @@
             <a:r>
               <a:rPr sz="1800" b="1" i="0">
                 <a:solidFill>
-                  <a:srgbClr val="71285B"/>
+                  <a:srgbClr val="721D59"/>
                 </a:solidFill>
               </a:rPr>
               <a:t>우리의 시작</a:t>
@@ -4472,7 +4472,7 @@
             <a:avLst/>
           </a:prstGeom>
           <a:solidFill>
-            <a:srgbClr val="BD4298"/>
+            <a:srgbClr val="D345A9"/>
           </a:solidFill>
           <a:ln w="38100">
             <a:solidFill>
@@ -4518,7 +4518,7 @@
             <a:r>
               <a:rPr sz="1600" b="1" i="0">
                 <a:solidFill>
-                  <a:srgbClr val="BD4298"/>
+                  <a:srgbClr val="D345A9"/>
                 </a:solidFill>
               </a:rPr>
               <a:t>아이가 태어난 날</a:t>
@@ -4556,7 +4556,7 @@
             <a:r>
               <a:rPr sz="1800" b="1" i="0">
                 <a:solidFill>
-                  <a:srgbClr val="71285B"/>
+                  <a:srgbClr val="721D59"/>
                 </a:solidFill>
               </a:rPr>
               <a:t>새 식구</a:t>
@@ -4617,7 +4617,7 @@
             <a:avLst/>
           </a:prstGeom>
           <a:solidFill>
-            <a:srgbClr val="BD4298"/>
+            <a:srgbClr val="D345A9"/>
           </a:solidFill>
           <a:ln w="38100">
             <a:solidFill>
@@ -4663,7 +4663,7 @@
             <a:r>
               <a:rPr sz="1600" b="1" i="0">
                 <a:solidFill>
-                  <a:srgbClr val="BD4298"/>
+                  <a:srgbClr val="D345A9"/>
                 </a:solidFill>
               </a:rPr>
               <a:t>첫 가족 여행</a:t>
@@ -4701,7 +4701,7 @@
             <a:r>
               <a:rPr sz="1800" b="1" i="0">
                 <a:solidFill>
-                  <a:srgbClr val="71285B"/>
+                  <a:srgbClr val="721D59"/>
                 </a:solidFill>
               </a:rPr>
               <a:t>함께 떠난 길</a:t>
@@ -4762,7 +4762,7 @@
             <a:avLst/>
           </a:prstGeom>
           <a:solidFill>
-            <a:srgbClr val="BD4298"/>
+            <a:srgbClr val="D345A9"/>
           </a:solidFill>
           <a:ln w="38100">
             <a:solidFill>
@@ -4808,7 +4808,7 @@
             <a:r>
               <a:rPr sz="1600" b="1" i="0">
                 <a:solidFill>
-                  <a:srgbClr val="BD4298"/>
+                  <a:srgbClr val="D345A9"/>
                 </a:solidFill>
               </a:rPr>
               <a:t>지금</a:t>
@@ -4846,7 +4846,7 @@
             <a:r>
               <a:rPr sz="1800" b="1" i="0">
                 <a:solidFill>
-                  <a:srgbClr val="71285B"/>
+                  <a:srgbClr val="721D59"/>
                 </a:solidFill>
               </a:rPr>
               <a:t>오늘의 우리</a:t>
@@ -4933,7 +4933,7 @@
             <a:avLst/>
           </a:prstGeom>
           <a:solidFill>
-            <a:srgbClr val="F1D0E7"/>
+            <a:srgbClr val="F7D4ED"/>
           </a:solidFill>
           <a:ln>
             <a:noFill/>
@@ -4962,7 +4962,7 @@
             <a:avLst/>
           </a:prstGeom>
           <a:solidFill>
-            <a:srgbClr val="BD4298"/>
+            <a:srgbClr val="D345A9"/>
           </a:solidFill>
           <a:ln>
             <a:noFill/>
@@ -5006,7 +5006,7 @@
             <a:r>
               <a:rPr sz="3000" b="1" i="0">
                 <a:solidFill>
-                  <a:srgbClr val="71285B"/>
+                  <a:srgbClr val="721D59"/>
                 </a:solidFill>
               </a:rPr>
               <a:t>우리 가족의 약속</a:t>
@@ -5031,11 +5031,11 @@
             </a:avLst>
           </a:prstGeom>
           <a:solidFill>
-            <a:srgbClr val="FAF0F7"/>
+            <a:srgbClr val="FCF3F9"/>
           </a:solidFill>
           <a:ln w="12700">
             <a:solidFill>
-              <a:srgbClr val="F1D0E7"/>
+              <a:srgbClr val="F7D4ED"/>
             </a:solidFill>
           </a:ln>
         </p:spPr>
@@ -5062,7 +5062,7 @@
             <a:avLst/>
           </a:prstGeom>
           <a:solidFill>
-            <a:srgbClr val="BD4298"/>
+            <a:srgbClr val="D345A9"/>
           </a:solidFill>
           <a:ln>
             <a:noFill/>
@@ -5120,7 +5120,7 @@
             <a:r>
               <a:rPr sz="1800" b="1" i="0">
                 <a:solidFill>
-                  <a:srgbClr val="71285B"/>
+                  <a:srgbClr val="721D59"/>
                 </a:solidFill>
               </a:rPr>
               <a:t>약속 1</a:t>
@@ -5183,11 +5183,11 @@
             </a:avLst>
           </a:prstGeom>
           <a:solidFill>
-            <a:srgbClr val="FAF0F7"/>
+            <a:srgbClr val="FCF3F9"/>
           </a:solidFill>
           <a:ln w="12700">
             <a:solidFill>
-              <a:srgbClr val="F1D0E7"/>
+              <a:srgbClr val="F7D4ED"/>
             </a:solidFill>
           </a:ln>
         </p:spPr>
@@ -5214,7 +5214,7 @@
             <a:avLst/>
           </a:prstGeom>
           <a:solidFill>
-            <a:srgbClr val="BD4298"/>
+            <a:srgbClr val="D345A9"/>
           </a:solidFill>
           <a:ln>
             <a:noFill/>
@@ -5272,7 +5272,7 @@
             <a:r>
               <a:rPr sz="1800" b="1" i="0">
                 <a:solidFill>
-                  <a:srgbClr val="71285B"/>
+                  <a:srgbClr val="721D59"/>
                 </a:solidFill>
               </a:rPr>
               <a:t>약속 2</a:t>
@@ -5335,11 +5335,11 @@
             </a:avLst>
           </a:prstGeom>
           <a:solidFill>
-            <a:srgbClr val="FAF0F7"/>
+            <a:srgbClr val="FCF3F9"/>
           </a:solidFill>
           <a:ln w="12700">
             <a:solidFill>
-              <a:srgbClr val="F1D0E7"/>
+              <a:srgbClr val="F7D4ED"/>
             </a:solidFill>
           </a:ln>
         </p:spPr>
@@ -5366,7 +5366,7 @@
             <a:avLst/>
           </a:prstGeom>
           <a:solidFill>
-            <a:srgbClr val="BD4298"/>
+            <a:srgbClr val="D345A9"/>
           </a:solidFill>
           <a:ln>
             <a:noFill/>
@@ -5424,7 +5424,7 @@
             <a:r>
               <a:rPr sz="1800" b="1" i="0">
                 <a:solidFill>
-                  <a:srgbClr val="71285B"/>
+                  <a:srgbClr val="721D59"/>
                 </a:solidFill>
               </a:rPr>
               <a:t>약속 3</a:t>
@@ -5511,7 +5511,7 @@
             <a:avLst/>
           </a:prstGeom>
           <a:solidFill>
-            <a:srgbClr val="F1D0E7"/>
+            <a:srgbClr val="F7D4ED"/>
           </a:solidFill>
           <a:ln>
             <a:noFill/>
@@ -5540,7 +5540,7 @@
             <a:avLst/>
           </a:prstGeom>
           <a:solidFill>
-            <a:srgbClr val="BD4298"/>
+            <a:srgbClr val="D345A9"/>
           </a:solidFill>
           <a:ln>
             <a:noFill/>
@@ -5584,7 +5584,7 @@
             <a:r>
               <a:rPr sz="3000" b="1" i="0">
                 <a:solidFill>
-                  <a:srgbClr val="71285B"/>
+                  <a:srgbClr val="721D59"/>
                 </a:solidFill>
               </a:rPr>
               <a:t>가족 사진</a:t>
@@ -5609,11 +5609,11 @@
             </a:avLst>
           </a:prstGeom>
           <a:solidFill>
-            <a:srgbClr val="F1D0E7"/>
+            <a:srgbClr val="F7D4ED"/>
           </a:solidFill>
           <a:ln w="19050">
             <a:solidFill>
-              <a:srgbClr val="BD4298"/>
+              <a:srgbClr val="D345A9"/>
             </a:solidFill>
             <a:prstDash val="dash"/>
           </a:ln>
@@ -5632,7 +5632,7 @@
             <a:r>
               <a:rPr sz="1200" b="0" i="0">
                 <a:solidFill>
-                  <a:srgbClr val="71285B"/>
+                  <a:srgbClr val="721D59"/>
                 </a:solidFill>
               </a:rPr>
               <a:t>사진 1</a:t>
@@ -5657,11 +5657,11 @@
             </a:avLst>
           </a:prstGeom>
           <a:solidFill>
-            <a:srgbClr val="F1D0E7"/>
+            <a:srgbClr val="F7D4ED"/>
           </a:solidFill>
           <a:ln w="19050">
             <a:solidFill>
-              <a:srgbClr val="BD4298"/>
+              <a:srgbClr val="D345A9"/>
             </a:solidFill>
             <a:prstDash val="dash"/>
           </a:ln>
@@ -5680,7 +5680,7 @@
             <a:r>
               <a:rPr sz="1200" b="0" i="0">
                 <a:solidFill>
-                  <a:srgbClr val="71285B"/>
+                  <a:srgbClr val="721D59"/>
                 </a:solidFill>
               </a:rPr>
               <a:t>사진 2</a:t>
@@ -5705,11 +5705,11 @@
             </a:avLst>
           </a:prstGeom>
           <a:solidFill>
-            <a:srgbClr val="F1D0E7"/>
+            <a:srgbClr val="F7D4ED"/>
           </a:solidFill>
           <a:ln w="19050">
             <a:solidFill>
-              <a:srgbClr val="BD4298"/>
+              <a:srgbClr val="D345A9"/>
             </a:solidFill>
             <a:prstDash val="dash"/>
           </a:ln>
@@ -5728,7 +5728,7 @@
             <a:r>
               <a:rPr sz="1200" b="0" i="0">
                 <a:solidFill>
-                  <a:srgbClr val="71285B"/>
+                  <a:srgbClr val="721D59"/>
                 </a:solidFill>
               </a:rPr>
               <a:t>사진 3</a:t>
@@ -5753,11 +5753,11 @@
             </a:avLst>
           </a:prstGeom>
           <a:solidFill>
-            <a:srgbClr val="F1D0E7"/>
+            <a:srgbClr val="F7D4ED"/>
           </a:solidFill>
           <a:ln w="19050">
             <a:solidFill>
-              <a:srgbClr val="BD4298"/>
+              <a:srgbClr val="D345A9"/>
             </a:solidFill>
             <a:prstDash val="dash"/>
           </a:ln>
@@ -5776,7 +5776,7 @@
             <a:r>
               <a:rPr sz="1200" b="0" i="0">
                 <a:solidFill>
-                  <a:srgbClr val="71285B"/>
+                  <a:srgbClr val="721D59"/>
                 </a:solidFill>
               </a:rPr>
               <a:t>사진 4</a:t>
@@ -5801,11 +5801,11 @@
             </a:avLst>
           </a:prstGeom>
           <a:solidFill>
-            <a:srgbClr val="F1D0E7"/>
+            <a:srgbClr val="F7D4ED"/>
           </a:solidFill>
           <a:ln w="19050">
             <a:solidFill>
-              <a:srgbClr val="BD4298"/>
+              <a:srgbClr val="D345A9"/>
             </a:solidFill>
             <a:prstDash val="dash"/>
           </a:ln>
@@ -5824,7 +5824,7 @@
             <a:r>
               <a:rPr sz="1200" b="0" i="0">
                 <a:solidFill>
-                  <a:srgbClr val="71285B"/>
+                  <a:srgbClr val="721D59"/>
                 </a:solidFill>
               </a:rPr>
               <a:t>사진 5</a:t>
@@ -5849,11 +5849,11 @@
             </a:avLst>
           </a:prstGeom>
           <a:solidFill>
-            <a:srgbClr val="F1D0E7"/>
+            <a:srgbClr val="F7D4ED"/>
           </a:solidFill>
           <a:ln w="19050">
             <a:solidFill>
-              <a:srgbClr val="BD4298"/>
+              <a:srgbClr val="D345A9"/>
             </a:solidFill>
             <a:prstDash val="dash"/>
           </a:ln>
@@ -5872,7 +5872,7 @@
             <a:r>
               <a:rPr sz="1200" b="0" i="0">
                 <a:solidFill>
-                  <a:srgbClr val="71285B"/>
+                  <a:srgbClr val="721D59"/>
                 </a:solidFill>
               </a:rPr>
               <a:t>사진 6</a:t>
@@ -5952,7 +5952,7 @@
             <a:r>
               <a:rPr sz="3600" b="1" i="0">
                 <a:solidFill>
-                  <a:srgbClr val="71285B"/>
+                  <a:srgbClr val="721D59"/>
                 </a:solidFill>
               </a:rPr>
               <a:t>우리 가족 소개를 마칩니다</a:t>
@@ -5990,7 +5990,7 @@
             <a:r>
               <a:rPr sz="1700" b="0" i="1">
                 <a:solidFill>
-                  <a:srgbClr val="71285B"/>
+                  <a:srgbClr val="721D59"/>
                 </a:solidFill>
               </a:rPr>
               <a:t>읽어 주셔서 고맙습니다</a:t>
@@ -6055,34 +6055,34 @@
         <a:sysClr val="window" lastClr="FFFFFF"/>
       </a:lt1>
       <a:dk2>
-        <a:srgbClr val="71285B"/>
+        <a:srgbClr val="721D59"/>
       </a:dk2>
       <a:lt2>
-        <a:srgbClr val="FAF0F7"/>
+        <a:srgbClr val="FCF3F9"/>
       </a:lt2>
       <a:accent1>
-        <a:srgbClr val="BD4298"/>
+        <a:srgbClr val="D345A9"/>
       </a:accent1>
       <a:accent2>
-        <a:srgbClr val="4C913B"/>
+        <a:srgbClr val="339941"/>
       </a:accent2>
       <a:accent3>
-        <a:srgbClr val="71285B"/>
+        <a:srgbClr val="721D59"/>
       </a:accent3>
       <a:accent4>
-        <a:srgbClr val="F1D0E7"/>
+        <a:srgbClr val="F7D4ED"/>
       </a:accent4>
       <a:accent5>
-        <a:srgbClr val="846A6A"/>
+        <a:srgbClr val="836F75"/>
       </a:accent5>
       <a:accent6>
-        <a:srgbClr val="AA7E9D"/>
+        <a:srgbClr val="AA779B"/>
       </a:accent6>
       <a:hlink>
-        <a:srgbClr val="BD4298"/>
+        <a:srgbClr val="D345A9"/>
       </a:hlink>
       <a:folHlink>
-        <a:srgbClr val="71285B"/>
+        <a:srgbClr val="721D59"/>
       </a:folHlink>
     </a:clrScheme>
     <a:fontScheme name="Office">

--- a/public/fun/pack/pptx/family/가족소개_07_아이와함께_뒷산진달래.pptx
+++ b/public/fun/pack/pptx/family/가족소개_07_아이와함께_뒷산진달래.pptx
@@ -3286,6 +3286,14 @@
 <file path=ppt/slides/slide1.xml><?xml version="1.0" encoding="utf-8"?>
 <p:sld xmlns:a="http://schemas.openxmlformats.org/drawingml/2006/main" xmlns:p="http://schemas.openxmlformats.org/presentationml/2006/main" xmlns:r="http://schemas.openxmlformats.org/officeDocument/2006/relationships">
   <p:cSld>
+    <p:bg>
+      <p:bgPr>
+        <a:solidFill>
+          <a:srgbClr val="FDEAF7"/>
+        </a:solidFill>
+        <a:effectLst/>
+      </p:bgPr>
+    </p:bg>
     <p:spTree>
       <p:nvGrpSpPr>
         <p:cNvPr id="1" name=""/>
@@ -3293,30 +3301,119 @@
         <p:nvPr/>
       </p:nvGrpSpPr>
       <p:grpSpPr/>
-      <p:pic>
-        <p:nvPicPr>
-          <p:cNvPr id="3" name="표지 그림" descr="family-07.jpg"/>
-          <p:cNvPicPr>
-            <a:picLocks noChangeAspect="1"/>
-          </p:cNvPicPr>
-          <p:nvPr/>
-        </p:nvPicPr>
-        <p:blipFill>
-          <a:blip r:embed="rId2"/>
-          <a:stretch>
-            <a:fillRect/>
-          </a:stretch>
-        </p:blipFill>
-        <p:spPr>
-          <a:xfrm>
-            <a:off x="0" y="0"/>
-            <a:ext cx="12191695" cy="6858000"/>
+      <p:sp>
+        <p:nvSpPr>
+          <p:cNvPr id="3" name="사진 자리"/>
+          <p:cNvSpPr/>
+          <p:nvPr/>
+        </p:nvSpPr>
+        <p:spPr>
+          <a:xfrm>
+            <a:off x="7558851" y="685800"/>
+            <a:ext cx="3169840" cy="5486400"/>
+          </a:xfrm>
+          <a:prstGeom prst="round2SameRect">
+            <a:avLst>
+              <a:gd name="adj1" fmla="val 50000"/>
+              <a:gd name="adj2" fmla="val 0"/>
+            </a:avLst>
+          </a:prstGeom>
+          <a:solidFill>
+            <a:srgbClr val="F2A6DB"/>
+          </a:solidFill>
+          <a:ln>
+            <a:noFill/>
+          </a:ln>
+        </p:spPr>
+        <p:txBody>
+          <a:bodyPr rtlCol="0" anchor="ctr" wrap="square" lIns="54864" rIns="54864" tIns="27432" bIns="27432">
+            <a:noAutofit/>
+          </a:bodyPr>
+          <a:lstStyle/>
+          <a:p>
+            <a:pPr algn="ctr">
+              <a:lnSpc>
+                <a:spcPct val="100000"/>
+              </a:lnSpc>
+            </a:pPr>
+            <a:r>
+              <a:rPr sz="1400" b="0" i="0">
+                <a:solidFill>
+                  <a:srgbClr val="49273F"/>
+                </a:solidFill>
+              </a:rPr>
+              <a:t>사진을 넣어 주세요</a:t>
+            </a:r>
+          </a:p>
+        </p:txBody>
+      </p:sp>
+      <p:sp>
+        <p:nvSpPr>
+          <p:cNvPr id="4" name="장식"/>
+          <p:cNvSpPr/>
+          <p:nvPr/>
+        </p:nvSpPr>
+        <p:spPr>
+          <a:xfrm>
+            <a:off x="6827349" y="4251960"/>
+            <a:ext cx="1005840" cy="1005840"/>
+          </a:xfrm>
+          <a:prstGeom prst="ellipse">
+            <a:avLst/>
+          </a:prstGeom>
+          <a:solidFill>
+            <a:srgbClr val="F2A6DB"/>
+          </a:solidFill>
+          <a:ln>
+            <a:noFill/>
+          </a:ln>
+        </p:spPr>
+        <p:txBody>
+          <a:bodyPr rtlCol="0" anchor="ctr"/>
+          <a:lstStyle/>
+          <a:p>
+            <a:pPr algn="ctr"/>
+          </a:p>
+        </p:txBody>
+      </p:sp>
+      <p:sp>
+        <p:nvSpPr>
+          <p:cNvPr id="5" name="라벨"/>
+          <p:cNvSpPr txBox="1"/>
+          <p:nvPr/>
+        </p:nvSpPr>
+        <p:spPr>
+          <a:xfrm>
+            <a:off x="822960" y="2148840"/>
+            <a:ext cx="5608179" cy="274320"/>
           </a:xfrm>
           <a:prstGeom prst="rect">
             <a:avLst/>
           </a:prstGeom>
-        </p:spPr>
-      </p:pic>
+          <a:noFill/>
+        </p:spPr>
+        <p:txBody>
+          <a:bodyPr wrap="square" lIns="54864" rIns="54864" tIns="27432" bIns="27432" anchor="t">
+            <a:noAutofit/>
+          </a:bodyPr>
+          <a:lstStyle/>
+          <a:p>
+            <a:pPr algn="l">
+              <a:lnSpc>
+                <a:spcPct val="115000"/>
+              </a:lnSpc>
+            </a:pPr>
+            <a:r>
+              <a:rPr sz="1000" b="1" i="0" spc="250">
+                <a:solidFill>
+                  <a:srgbClr val="26231F"/>
+                </a:solidFill>
+              </a:rPr>
+              <a:t>FAMILY ALBUM</a:t>
+            </a:r>
+          </a:p>
+        </p:txBody>
+      </p:sp>
       <p:sp>
         <p:nvSpPr>
           <p:cNvPr id="2" name="Title 1"/>
@@ -3329,8 +3426,8 @@
         </p:nvSpPr>
         <p:spPr>
           <a:xfrm>
-            <a:off x="853418" y="2057400"/>
-            <a:ext cx="6095847" cy="1554480"/>
+            <a:off x="822960" y="2606040"/>
+            <a:ext cx="5608179" cy="1188720"/>
           </a:xfrm>
         </p:spPr>
         <p:txBody>
@@ -3345,9 +3442,9 @@
               </a:lnSpc>
             </a:pPr>
             <a:r>
-              <a:rPr sz="3600" b="1" i="0">
-                <a:solidFill>
-                  <a:srgbClr val="721D59"/>
+              <a:rPr sz="4000" b="1" i="0">
+                <a:solidFill>
+                  <a:srgbClr val="26231F"/>
                 </a:solidFill>
               </a:rPr>
               <a:t>우리 가족을 소개합니다</a:t>
@@ -3357,14 +3454,14 @@
       </p:sp>
       <p:sp>
         <p:nvSpPr>
-          <p:cNvPr id="4" name="한 줄 문구"/>
+          <p:cNvPr id="6" name="한 줄 문구"/>
           <p:cNvSpPr txBox="1"/>
           <p:nvPr/>
         </p:nvSpPr>
         <p:spPr>
           <a:xfrm>
-            <a:off x="853418" y="3749039"/>
-            <a:ext cx="6095847" cy="822960"/>
+            <a:off x="822960" y="3886200"/>
+            <a:ext cx="5608179" cy="822960"/>
           </a:xfrm>
           <a:prstGeom prst="rect">
             <a:avLst/>
@@ -3383,9 +3480,9 @@
               </a:lnSpc>
             </a:pPr>
             <a:r>
-              <a:rPr sz="1700" b="0" i="1">
-                <a:solidFill>
-                  <a:srgbClr val="721D59"/>
+              <a:rPr sz="1700" b="0" i="0">
+                <a:solidFill>
+                  <a:srgbClr val="26231F"/>
                 </a:solidFill>
               </a:rPr>
               <a:t>뒷산 진달래 따러 간 아이들</a:t>
@@ -3395,14 +3492,14 @@
       </p:sp>
       <p:sp>
         <p:nvSpPr>
-          <p:cNvPr id="5" name="안내 문구"/>
+          <p:cNvPr id="7" name="안내 문구"/>
           <p:cNvSpPr txBox="1"/>
           <p:nvPr/>
         </p:nvSpPr>
         <p:spPr>
           <a:xfrm>
-            <a:off x="853418" y="4617720"/>
-            <a:ext cx="6095847" cy="914400"/>
+            <a:off x="822960" y="4754880"/>
+            <a:ext cx="5608179" cy="914400"/>
           </a:xfrm>
           <a:prstGeom prst="rect">
             <a:avLst/>
@@ -3423,10 +3520,10 @@
             <a:r>
               <a:rPr sz="1400" b="0" i="0">
                 <a:solidFill>
-                  <a:srgbClr val="666666"/>
+                  <a:srgbClr val="26231F"/>
                 </a:solidFill>
               </a:rPr>
-              <a:t>아이와 함께 · 2027. 00. 00</a:t>
+              <a:t>아이와 함께 · 날짜 입력</a:t>
             </a:r>
           </a:p>
         </p:txBody>
@@ -3445,7 +3542,7 @@
     <p:bg>
       <p:bgPr>
         <a:solidFill>
-          <a:srgbClr val="FFFFFF"/>
+          <a:srgbClr val="FDFAFC"/>
         </a:solidFill>
         <a:effectLst/>
       </p:bgPr>
@@ -3459,20 +3556,20 @@
       <p:grpSpPr/>
       <p:sp>
         <p:nvSpPr>
-          <p:cNvPr id="3" name="장식"/>
+          <p:cNvPr id="3" name="포인트"/>
           <p:cNvSpPr/>
           <p:nvPr/>
         </p:nvSpPr>
         <p:spPr>
           <a:xfrm>
-            <a:off x="-182880" y="6144768"/>
-            <a:ext cx="12557455" cy="731520"/>
-          </a:xfrm>
-          <a:prstGeom prst="wave">
+            <a:off x="5958687" y="246888"/>
+            <a:ext cx="274320" cy="274320"/>
+          </a:xfrm>
+          <a:prstGeom prst="star4">
             <a:avLst/>
           </a:prstGeom>
           <a:solidFill>
-            <a:srgbClr val="F7D4ED"/>
+            <a:srgbClr val="ED97D3"/>
           </a:solidFill>
           <a:ln>
             <a:noFill/>
@@ -3494,14 +3591,14 @@
         </p:nvSpPr>
         <p:spPr>
           <a:xfrm>
-            <a:off x="-182880" y="6400800"/>
-            <a:ext cx="12557455" cy="502920"/>
-          </a:xfrm>
-          <a:prstGeom prst="wave">
+            <a:off x="5684367" y="1572768"/>
+            <a:ext cx="822960" cy="22860"/>
+          </a:xfrm>
+          <a:prstGeom prst="rect">
             <a:avLst/>
           </a:prstGeom>
           <a:solidFill>
-            <a:srgbClr val="D345A9"/>
+            <a:srgbClr val="ED97D3"/>
           </a:solidFill>
           <a:ln>
             <a:noFill/>
@@ -3517,19 +3614,19 @@
       </p:sp>
       <p:sp>
         <p:nvSpPr>
-          <p:cNvPr id="2" name="Title 1"/>
-          <p:cNvSpPr>
-            <a:spLocks noGrp="1"/>
-          </p:cNvSpPr>
-          <p:nvPr>
-            <p:ph type="title"/>
-          </p:nvPr>
-        </p:nvSpPr>
-        <p:spPr>
-          <a:xfrm>
-            <a:off x="640080" y="457200"/>
-            <a:ext cx="9722815" cy="868680"/>
-          </a:xfrm>
+          <p:cNvPr id="5" name="상단 라벨"/>
+          <p:cNvSpPr txBox="1"/>
+          <p:nvPr/>
+        </p:nvSpPr>
+        <p:spPr>
+          <a:xfrm>
+            <a:off x="640080" y="182880"/>
+            <a:ext cx="3657600" cy="274320"/>
+          </a:xfrm>
+          <a:prstGeom prst="rect">
+            <a:avLst/>
+          </a:prstGeom>
+          <a:noFill/>
         </p:spPr>
         <p:txBody>
           <a:bodyPr wrap="square" lIns="54864" rIns="54864" tIns="27432" bIns="27432" anchor="ctr">
@@ -3538,6 +3635,44 @@
           <a:lstStyle/>
           <a:p>
             <a:pPr algn="l">
+              <a:lnSpc>
+                <a:spcPct val="115000"/>
+              </a:lnSpc>
+            </a:pPr>
+            <a:r>
+              <a:rPr sz="800" b="1" i="0" spc="250">
+                <a:solidFill>
+                  <a:srgbClr val="8E8780"/>
+                </a:solidFill>
+              </a:rPr>
+              <a:t>FAMILY ALBUM</a:t>
+            </a:r>
+          </a:p>
+        </p:txBody>
+      </p:sp>
+      <p:sp>
+        <p:nvSpPr>
+          <p:cNvPr id="2" name="Title 1"/>
+          <p:cNvSpPr>
+            <a:spLocks noGrp="1"/>
+          </p:cNvSpPr>
+          <p:nvPr>
+            <p:ph type="title"/>
+          </p:nvPr>
+        </p:nvSpPr>
+        <p:spPr>
+          <a:xfrm>
+            <a:off x="1371600" y="640080"/>
+            <a:ext cx="9448495" cy="868680"/>
+          </a:xfrm>
+        </p:spPr>
+        <p:txBody>
+          <a:bodyPr wrap="square" lIns="54864" rIns="54864" tIns="27432" bIns="27432" anchor="ctr">
+            <a:noAutofit/>
+          </a:bodyPr>
+          <a:lstStyle/>
+          <a:p>
+            <a:pPr algn="ctr">
               <a:lnSpc>
                 <a:spcPct val="105000"/>
               </a:lnSpc>
@@ -3545,7 +3680,7 @@
             <a:r>
               <a:rPr sz="3000" b="1" i="0">
                 <a:solidFill>
-                  <a:srgbClr val="721D59"/>
+                  <a:srgbClr val="26231F"/>
                 </a:solidFill>
               </a:rPr>
               <a:t>가족 구성원</a:t>
@@ -3555,25 +3690,23 @@
       </p:sp>
       <p:sp>
         <p:nvSpPr>
-          <p:cNvPr id="5" name="사진 자리"/>
+          <p:cNvPr id="6" name="사진 자리"/>
           <p:cNvSpPr/>
           <p:nvPr/>
         </p:nvSpPr>
         <p:spPr>
           <a:xfrm>
-            <a:off x="821016" y="1554480"/>
-            <a:ext cx="2194560" cy="2194560"/>
+            <a:off x="777239" y="1783080"/>
+            <a:ext cx="2282113" cy="2282113"/>
           </a:xfrm>
           <a:prstGeom prst="ellipse">
             <a:avLst/>
           </a:prstGeom>
           <a:solidFill>
-            <a:srgbClr val="F7D4ED"/>
+            <a:srgbClr val="FAD1EE"/>
           </a:solidFill>
           <a:ln w="19050">
-            <a:solidFill>
-              <a:srgbClr val="D345A9"/>
-            </a:solidFill>
+            <a:noFill/>
             <a:prstDash val="dash"/>
           </a:ln>
         </p:spPr>
@@ -3591,7 +3724,7 @@
             <a:r>
               <a:rPr sz="1200" b="0" i="0">
                 <a:solidFill>
-                  <a:srgbClr val="721D59"/>
+                  <a:srgbClr val="8E8780"/>
                 </a:solidFill>
               </a:rPr>
               <a:t>사진</a:t>
@@ -3601,13 +3734,13 @@
       </p:sp>
       <p:sp>
         <p:nvSpPr>
-          <p:cNvPr id="6" name="TextBox 5"/>
+          <p:cNvPr id="7" name="TextBox 6"/>
           <p:cNvSpPr txBox="1"/>
           <p:nvPr/>
         </p:nvSpPr>
         <p:spPr>
           <a:xfrm>
-            <a:off x="640080" y="3840479"/>
+            <a:off x="640080" y="4156633"/>
             <a:ext cx="2556433" cy="411480"/>
           </a:xfrm>
           <a:prstGeom prst="rect">
@@ -3629,7 +3762,7 @@
             <a:r>
               <a:rPr sz="1600" b="1" i="0">
                 <a:solidFill>
-                  <a:srgbClr val="721D59"/>
+                  <a:srgbClr val="49273F"/>
                 </a:solidFill>
               </a:rPr>
               <a:t>아빠</a:t>
@@ -3639,14 +3772,14 @@
       </p:sp>
       <p:sp>
         <p:nvSpPr>
-          <p:cNvPr id="7" name="TextBox 6"/>
+          <p:cNvPr id="8" name="TextBox 7"/>
           <p:cNvSpPr txBox="1"/>
           <p:nvPr/>
         </p:nvSpPr>
         <p:spPr>
           <a:xfrm>
-            <a:off x="731519" y="4297679"/>
-            <a:ext cx="2373553" cy="1645919"/>
+            <a:off x="731519" y="4613833"/>
+            <a:ext cx="2373553" cy="1741246"/>
           </a:xfrm>
           <a:prstGeom prst="rect">
             <a:avLst/>
@@ -3707,25 +3840,23 @@
       </p:sp>
       <p:sp>
         <p:nvSpPr>
-          <p:cNvPr id="8" name="사진 자리"/>
+          <p:cNvPr id="9" name="사진 자리"/>
           <p:cNvSpPr/>
           <p:nvPr/>
         </p:nvSpPr>
         <p:spPr>
           <a:xfrm>
-            <a:off x="3606050" y="1554480"/>
-            <a:ext cx="2194560" cy="2194560"/>
+            <a:off x="3562273" y="1783080"/>
+            <a:ext cx="2282113" cy="2282113"/>
           </a:xfrm>
           <a:prstGeom prst="ellipse">
             <a:avLst/>
           </a:prstGeom>
           <a:solidFill>
-            <a:srgbClr val="F7D4ED"/>
+            <a:srgbClr val="FAD1EE"/>
           </a:solidFill>
           <a:ln w="19050">
-            <a:solidFill>
-              <a:srgbClr val="D345A9"/>
-            </a:solidFill>
+            <a:noFill/>
             <a:prstDash val="dash"/>
           </a:ln>
         </p:spPr>
@@ -3743,7 +3874,7 @@
             <a:r>
               <a:rPr sz="1200" b="0" i="0">
                 <a:solidFill>
-                  <a:srgbClr val="721D59"/>
+                  <a:srgbClr val="8E8780"/>
                 </a:solidFill>
               </a:rPr>
               <a:t>사진</a:t>
@@ -3753,13 +3884,13 @@
       </p:sp>
       <p:sp>
         <p:nvSpPr>
-          <p:cNvPr id="9" name="TextBox 8"/>
+          <p:cNvPr id="10" name="TextBox 9"/>
           <p:cNvSpPr txBox="1"/>
           <p:nvPr/>
         </p:nvSpPr>
         <p:spPr>
           <a:xfrm>
-            <a:off x="3425113" y="3840479"/>
+            <a:off x="3425113" y="4156633"/>
             <a:ext cx="2556433" cy="411480"/>
           </a:xfrm>
           <a:prstGeom prst="rect">
@@ -3781,7 +3912,7 @@
             <a:r>
               <a:rPr sz="1600" b="1" i="0">
                 <a:solidFill>
-                  <a:srgbClr val="721D59"/>
+                  <a:srgbClr val="49273F"/>
                 </a:solidFill>
               </a:rPr>
               <a:t>엄마</a:t>
@@ -3791,14 +3922,14 @@
       </p:sp>
       <p:sp>
         <p:nvSpPr>
-          <p:cNvPr id="10" name="TextBox 9"/>
+          <p:cNvPr id="11" name="TextBox 10"/>
           <p:cNvSpPr txBox="1"/>
           <p:nvPr/>
         </p:nvSpPr>
         <p:spPr>
           <a:xfrm>
-            <a:off x="3516553" y="4297679"/>
-            <a:ext cx="2373553" cy="1645919"/>
+            <a:off x="3516553" y="4613833"/>
+            <a:ext cx="2373553" cy="1741246"/>
           </a:xfrm>
           <a:prstGeom prst="rect">
             <a:avLst/>
@@ -3859,25 +3990,23 @@
       </p:sp>
       <p:sp>
         <p:nvSpPr>
-          <p:cNvPr id="11" name="사진 자리"/>
+          <p:cNvPr id="12" name="사진 자리"/>
           <p:cNvSpPr/>
           <p:nvPr/>
         </p:nvSpPr>
         <p:spPr>
           <a:xfrm>
-            <a:off x="6391084" y="1554480"/>
-            <a:ext cx="2194560" cy="2194560"/>
+            <a:off x="6347307" y="1783080"/>
+            <a:ext cx="2282113" cy="2282113"/>
           </a:xfrm>
           <a:prstGeom prst="ellipse">
             <a:avLst/>
           </a:prstGeom>
           <a:solidFill>
-            <a:srgbClr val="F7D4ED"/>
+            <a:srgbClr val="FAD1EE"/>
           </a:solidFill>
           <a:ln w="19050">
-            <a:solidFill>
-              <a:srgbClr val="D345A9"/>
-            </a:solidFill>
+            <a:noFill/>
             <a:prstDash val="dash"/>
           </a:ln>
         </p:spPr>
@@ -3895,7 +4024,7 @@
             <a:r>
               <a:rPr sz="1200" b="0" i="0">
                 <a:solidFill>
-                  <a:srgbClr val="721D59"/>
+                  <a:srgbClr val="8E8780"/>
                 </a:solidFill>
               </a:rPr>
               <a:t>사진</a:t>
@@ -3905,13 +4034,13 @@
       </p:sp>
       <p:sp>
         <p:nvSpPr>
-          <p:cNvPr id="12" name="TextBox 11"/>
+          <p:cNvPr id="13" name="TextBox 12"/>
           <p:cNvSpPr txBox="1"/>
           <p:nvPr/>
         </p:nvSpPr>
         <p:spPr>
           <a:xfrm>
-            <a:off x="6210147" y="3840479"/>
+            <a:off x="6210147" y="4156633"/>
             <a:ext cx="2556433" cy="411480"/>
           </a:xfrm>
           <a:prstGeom prst="rect">
@@ -3933,7 +4062,7 @@
             <a:r>
               <a:rPr sz="1600" b="1" i="0">
                 <a:solidFill>
-                  <a:srgbClr val="721D59"/>
+                  <a:srgbClr val="49273F"/>
                 </a:solidFill>
               </a:rPr>
               <a:t>첫째</a:t>
@@ -3943,14 +4072,14 @@
       </p:sp>
       <p:sp>
         <p:nvSpPr>
-          <p:cNvPr id="13" name="TextBox 12"/>
+          <p:cNvPr id="14" name="TextBox 13"/>
           <p:cNvSpPr txBox="1"/>
           <p:nvPr/>
         </p:nvSpPr>
         <p:spPr>
           <a:xfrm>
-            <a:off x="6301587" y="4297679"/>
-            <a:ext cx="2373553" cy="1645919"/>
+            <a:off x="6301587" y="4613833"/>
+            <a:ext cx="2373553" cy="1741246"/>
           </a:xfrm>
           <a:prstGeom prst="rect">
             <a:avLst/>
@@ -4011,25 +4140,23 @@
       </p:sp>
       <p:sp>
         <p:nvSpPr>
-          <p:cNvPr id="14" name="사진 자리"/>
+          <p:cNvPr id="15" name="사진 자리"/>
           <p:cNvSpPr/>
           <p:nvPr/>
         </p:nvSpPr>
         <p:spPr>
           <a:xfrm>
-            <a:off x="9176118" y="1554480"/>
-            <a:ext cx="2194560" cy="2194560"/>
+            <a:off x="9132341" y="1783080"/>
+            <a:ext cx="2282113" cy="2282113"/>
           </a:xfrm>
           <a:prstGeom prst="ellipse">
             <a:avLst/>
           </a:prstGeom>
           <a:solidFill>
-            <a:srgbClr val="F7D4ED"/>
+            <a:srgbClr val="FAD1EE"/>
           </a:solidFill>
           <a:ln w="19050">
-            <a:solidFill>
-              <a:srgbClr val="D345A9"/>
-            </a:solidFill>
+            <a:noFill/>
             <a:prstDash val="dash"/>
           </a:ln>
         </p:spPr>
@@ -4047,7 +4174,7 @@
             <a:r>
               <a:rPr sz="1200" b="0" i="0">
                 <a:solidFill>
-                  <a:srgbClr val="721D59"/>
+                  <a:srgbClr val="8E8780"/>
                 </a:solidFill>
               </a:rPr>
               <a:t>사진</a:t>
@@ -4057,13 +4184,13 @@
       </p:sp>
       <p:sp>
         <p:nvSpPr>
-          <p:cNvPr id="15" name="TextBox 14"/>
+          <p:cNvPr id="16" name="TextBox 15"/>
           <p:cNvSpPr txBox="1"/>
           <p:nvPr/>
         </p:nvSpPr>
         <p:spPr>
           <a:xfrm>
-            <a:off x="8995181" y="3840479"/>
+            <a:off x="8995181" y="4156633"/>
             <a:ext cx="2556433" cy="411480"/>
           </a:xfrm>
           <a:prstGeom prst="rect">
@@ -4085,7 +4212,7 @@
             <a:r>
               <a:rPr sz="1600" b="1" i="0">
                 <a:solidFill>
-                  <a:srgbClr val="721D59"/>
+                  <a:srgbClr val="49273F"/>
                 </a:solidFill>
               </a:rPr>
               <a:t>둘째</a:t>
@@ -4095,14 +4222,14 @@
       </p:sp>
       <p:sp>
         <p:nvSpPr>
-          <p:cNvPr id="16" name="TextBox 15"/>
+          <p:cNvPr id="17" name="TextBox 16"/>
           <p:cNvSpPr txBox="1"/>
           <p:nvPr/>
         </p:nvSpPr>
         <p:spPr>
           <a:xfrm>
-            <a:off x="9086621" y="4297679"/>
-            <a:ext cx="2373553" cy="1645919"/>
+            <a:off x="9086621" y="4613833"/>
+            <a:ext cx="2373553" cy="1741246"/>
           </a:xfrm>
           <a:prstGeom prst="rect">
             <a:avLst/>
@@ -4175,7 +4302,7 @@
     <p:bg>
       <p:bgPr>
         <a:solidFill>
-          <a:srgbClr val="FFFFFF"/>
+          <a:srgbClr val="FDFAFC"/>
         </a:solidFill>
         <a:effectLst/>
       </p:bgPr>
@@ -4189,20 +4316,20 @@
       <p:grpSpPr/>
       <p:sp>
         <p:nvSpPr>
-          <p:cNvPr id="3" name="장식"/>
+          <p:cNvPr id="3" name="포인트"/>
           <p:cNvSpPr/>
           <p:nvPr/>
         </p:nvSpPr>
         <p:spPr>
           <a:xfrm>
-            <a:off x="-182880" y="6144768"/>
-            <a:ext cx="12557455" cy="731520"/>
-          </a:xfrm>
-          <a:prstGeom prst="wave">
+            <a:off x="5958687" y="246888"/>
+            <a:ext cx="274320" cy="274320"/>
+          </a:xfrm>
+          <a:prstGeom prst="star4">
             <a:avLst/>
           </a:prstGeom>
           <a:solidFill>
-            <a:srgbClr val="F7D4ED"/>
+            <a:srgbClr val="ED97D3"/>
           </a:solidFill>
           <a:ln>
             <a:noFill/>
@@ -4224,14 +4351,14 @@
         </p:nvSpPr>
         <p:spPr>
           <a:xfrm>
-            <a:off x="-182880" y="6400800"/>
-            <a:ext cx="12557455" cy="502920"/>
-          </a:xfrm>
-          <a:prstGeom prst="wave">
+            <a:off x="5684367" y="1572768"/>
+            <a:ext cx="822960" cy="22860"/>
+          </a:xfrm>
+          <a:prstGeom prst="rect">
             <a:avLst/>
           </a:prstGeom>
           <a:solidFill>
-            <a:srgbClr val="D345A9"/>
+            <a:srgbClr val="ED97D3"/>
           </a:solidFill>
           <a:ln>
             <a:noFill/>
@@ -4247,19 +4374,19 @@
       </p:sp>
       <p:sp>
         <p:nvSpPr>
-          <p:cNvPr id="2" name="Title 1"/>
-          <p:cNvSpPr>
-            <a:spLocks noGrp="1"/>
-          </p:cNvSpPr>
-          <p:nvPr>
-            <p:ph type="title"/>
-          </p:nvPr>
-        </p:nvSpPr>
-        <p:spPr>
-          <a:xfrm>
-            <a:off x="640080" y="457200"/>
-            <a:ext cx="9722815" cy="868680"/>
-          </a:xfrm>
+          <p:cNvPr id="5" name="상단 라벨"/>
+          <p:cNvSpPr txBox="1"/>
+          <p:nvPr/>
+        </p:nvSpPr>
+        <p:spPr>
+          <a:xfrm>
+            <a:off x="640080" y="182880"/>
+            <a:ext cx="3657600" cy="274320"/>
+          </a:xfrm>
+          <a:prstGeom prst="rect">
+            <a:avLst/>
+          </a:prstGeom>
+          <a:noFill/>
         </p:spPr>
         <p:txBody>
           <a:bodyPr wrap="square" lIns="54864" rIns="54864" tIns="27432" bIns="27432" anchor="ctr">
@@ -4268,6 +4395,44 @@
           <a:lstStyle/>
           <a:p>
             <a:pPr algn="l">
+              <a:lnSpc>
+                <a:spcPct val="115000"/>
+              </a:lnSpc>
+            </a:pPr>
+            <a:r>
+              <a:rPr sz="800" b="1" i="0" spc="250">
+                <a:solidFill>
+                  <a:srgbClr val="8E8780"/>
+                </a:solidFill>
+              </a:rPr>
+              <a:t>FAMILY ALBUM</a:t>
+            </a:r>
+          </a:p>
+        </p:txBody>
+      </p:sp>
+      <p:sp>
+        <p:nvSpPr>
+          <p:cNvPr id="2" name="Title 1"/>
+          <p:cNvSpPr>
+            <a:spLocks noGrp="1"/>
+          </p:cNvSpPr>
+          <p:nvPr>
+            <p:ph type="title"/>
+          </p:nvPr>
+        </p:nvSpPr>
+        <p:spPr>
+          <a:xfrm>
+            <a:off x="1371600" y="640080"/>
+            <a:ext cx="9448495" cy="868680"/>
+          </a:xfrm>
+        </p:spPr>
+        <p:txBody>
+          <a:bodyPr wrap="square" lIns="54864" rIns="54864" tIns="27432" bIns="27432" anchor="ctr">
+            <a:noAutofit/>
+          </a:bodyPr>
+          <a:lstStyle/>
+          <a:p>
+            <a:pPr algn="ctr">
               <a:lnSpc>
                 <a:spcPct val="105000"/>
               </a:lnSpc>
@@ -4275,7 +4440,7 @@
             <a:r>
               <a:rPr sz="3000" b="1" i="0">
                 <a:solidFill>
-                  <a:srgbClr val="721D59"/>
+                  <a:srgbClr val="26231F"/>
                 </a:solidFill>
               </a:rPr>
               <a:t>우리 가족 이야기</a:t>
@@ -4285,20 +4450,20 @@
       </p:sp>
       <p:sp>
         <p:nvSpPr>
-          <p:cNvPr id="5" name="타임라인 선"/>
+          <p:cNvPr id="6" name="타임라인 선"/>
           <p:cNvSpPr/>
           <p:nvPr/>
         </p:nvSpPr>
         <p:spPr>
           <a:xfrm>
-            <a:off x="640080" y="3291840"/>
+            <a:off x="640080" y="3520440"/>
             <a:ext cx="10911535" cy="54864"/>
           </a:xfrm>
           <a:prstGeom prst="rect">
             <a:avLst/>
           </a:prstGeom>
           <a:solidFill>
-            <a:srgbClr val="F7D4ED"/>
+            <a:srgbClr val="FAD1EE"/>
           </a:solidFill>
           <a:ln>
             <a:noFill/>
@@ -4314,20 +4479,20 @@
       </p:sp>
       <p:sp>
         <p:nvSpPr>
-          <p:cNvPr id="6" name="때 1"/>
+          <p:cNvPr id="7" name="때 1"/>
           <p:cNvSpPr/>
           <p:nvPr/>
         </p:nvSpPr>
         <p:spPr>
           <a:xfrm>
-            <a:off x="1802853" y="3108960"/>
+            <a:off x="1802853" y="3337560"/>
             <a:ext cx="402336" cy="402336"/>
           </a:xfrm>
           <a:prstGeom prst="ellipse">
             <a:avLst/>
           </a:prstGeom>
           <a:solidFill>
-            <a:srgbClr val="D345A9"/>
+            <a:srgbClr val="ED97D3"/>
           </a:solidFill>
           <a:ln w="38100">
             <a:solidFill>
@@ -4345,13 +4510,13 @@
       </p:sp>
       <p:sp>
         <p:nvSpPr>
-          <p:cNvPr id="7" name="TextBox 6"/>
+          <p:cNvPr id="8" name="TextBox 7"/>
           <p:cNvSpPr txBox="1"/>
           <p:nvPr/>
         </p:nvSpPr>
         <p:spPr>
           <a:xfrm>
-            <a:off x="685800" y="2468880"/>
+            <a:off x="685800" y="2697480"/>
             <a:ext cx="2636443" cy="457200"/>
           </a:xfrm>
           <a:prstGeom prst="rect">
@@ -4373,7 +4538,7 @@
             <a:r>
               <a:rPr sz="1600" b="1" i="0">
                 <a:solidFill>
-                  <a:srgbClr val="D345A9"/>
+                  <a:srgbClr val="ED97D3"/>
                 </a:solidFill>
               </a:rPr>
               <a:t>가족이 된 날</a:t>
@@ -4383,13 +4548,13 @@
       </p:sp>
       <p:sp>
         <p:nvSpPr>
-          <p:cNvPr id="8" name="TextBox 7"/>
+          <p:cNvPr id="9" name="TextBox 8"/>
           <p:cNvSpPr txBox="1"/>
           <p:nvPr/>
         </p:nvSpPr>
         <p:spPr>
           <a:xfrm>
-            <a:off x="731519" y="3657600"/>
+            <a:off x="731519" y="3886200"/>
             <a:ext cx="2545003" cy="457200"/>
           </a:xfrm>
           <a:prstGeom prst="rect">
@@ -4411,7 +4576,7 @@
             <a:r>
               <a:rPr sz="1800" b="1" i="0">
                 <a:solidFill>
-                  <a:srgbClr val="721D59"/>
+                  <a:srgbClr val="49273F"/>
                 </a:solidFill>
               </a:rPr>
               <a:t>우리의 시작</a:t>
@@ -4421,13 +4586,13 @@
       </p:sp>
       <p:sp>
         <p:nvSpPr>
-          <p:cNvPr id="9" name="TextBox 8"/>
+          <p:cNvPr id="10" name="TextBox 9"/>
           <p:cNvSpPr txBox="1"/>
           <p:nvPr/>
         </p:nvSpPr>
         <p:spPr>
           <a:xfrm>
-            <a:off x="731519" y="4160520"/>
+            <a:off x="731519" y="4389120"/>
             <a:ext cx="2545003" cy="1645920"/>
           </a:xfrm>
           <a:prstGeom prst="rect">
@@ -4449,7 +4614,7 @@
             <a:r>
               <a:rPr sz="1500" b="0" i="0">
                 <a:solidFill>
-                  <a:srgbClr val="2B2B2B"/>
+                  <a:srgbClr val="26231F"/>
                 </a:solidFill>
               </a:rPr>
               <a:t>처음 만난 날의 이야기</a:t>
@@ -4459,20 +4624,20 @@
       </p:sp>
       <p:sp>
         <p:nvSpPr>
-          <p:cNvPr id="10" name="때 2"/>
+          <p:cNvPr id="11" name="때 2"/>
           <p:cNvSpPr/>
           <p:nvPr/>
         </p:nvSpPr>
         <p:spPr>
           <a:xfrm>
-            <a:off x="4530737" y="3108960"/>
+            <a:off x="4530737" y="3337560"/>
             <a:ext cx="402336" cy="402336"/>
           </a:xfrm>
           <a:prstGeom prst="ellipse">
             <a:avLst/>
           </a:prstGeom>
           <a:solidFill>
-            <a:srgbClr val="D345A9"/>
+            <a:srgbClr val="ED97D3"/>
           </a:solidFill>
           <a:ln w="38100">
             <a:solidFill>
@@ -4490,13 +4655,13 @@
       </p:sp>
       <p:sp>
         <p:nvSpPr>
-          <p:cNvPr id="11" name="TextBox 10"/>
+          <p:cNvPr id="12" name="TextBox 11"/>
           <p:cNvSpPr txBox="1"/>
           <p:nvPr/>
         </p:nvSpPr>
         <p:spPr>
           <a:xfrm>
-            <a:off x="3413683" y="2468880"/>
+            <a:off x="3413683" y="2697480"/>
             <a:ext cx="2636443" cy="457200"/>
           </a:xfrm>
           <a:prstGeom prst="rect">
@@ -4518,7 +4683,7 @@
             <a:r>
               <a:rPr sz="1600" b="1" i="0">
                 <a:solidFill>
-                  <a:srgbClr val="D345A9"/>
+                  <a:srgbClr val="ED97D3"/>
                 </a:solidFill>
               </a:rPr>
               <a:t>아이가 태어난 날</a:t>
@@ -4528,13 +4693,13 @@
       </p:sp>
       <p:sp>
         <p:nvSpPr>
-          <p:cNvPr id="12" name="TextBox 11"/>
+          <p:cNvPr id="13" name="TextBox 12"/>
           <p:cNvSpPr txBox="1"/>
           <p:nvPr/>
         </p:nvSpPr>
         <p:spPr>
           <a:xfrm>
-            <a:off x="3459403" y="3657600"/>
+            <a:off x="3459403" y="3886200"/>
             <a:ext cx="2545003" cy="457200"/>
           </a:xfrm>
           <a:prstGeom prst="rect">
@@ -4556,7 +4721,7 @@
             <a:r>
               <a:rPr sz="1800" b="1" i="0">
                 <a:solidFill>
-                  <a:srgbClr val="721D59"/>
+                  <a:srgbClr val="49273F"/>
                 </a:solidFill>
               </a:rPr>
               <a:t>새 식구</a:t>
@@ -4566,13 +4731,13 @@
       </p:sp>
       <p:sp>
         <p:nvSpPr>
-          <p:cNvPr id="13" name="TextBox 12"/>
+          <p:cNvPr id="14" name="TextBox 13"/>
           <p:cNvSpPr txBox="1"/>
           <p:nvPr/>
         </p:nvSpPr>
         <p:spPr>
           <a:xfrm>
-            <a:off x="3459403" y="4160520"/>
+            <a:off x="3459403" y="4389120"/>
             <a:ext cx="2545003" cy="1645920"/>
           </a:xfrm>
           <a:prstGeom prst="rect">
@@ -4594,7 +4759,7 @@
             <a:r>
               <a:rPr sz="1500" b="0" i="0">
                 <a:solidFill>
-                  <a:srgbClr val="2B2B2B"/>
+                  <a:srgbClr val="26231F"/>
                 </a:solidFill>
               </a:rPr>
               <a:t>그날의 기억을 적어요</a:t>
@@ -4604,20 +4769,20 @@
       </p:sp>
       <p:sp>
         <p:nvSpPr>
-          <p:cNvPr id="14" name="때 3"/>
+          <p:cNvPr id="15" name="때 3"/>
           <p:cNvSpPr/>
           <p:nvPr/>
         </p:nvSpPr>
         <p:spPr>
           <a:xfrm>
-            <a:off x="7258621" y="3108960"/>
+            <a:off x="7258621" y="3337560"/>
             <a:ext cx="402336" cy="402336"/>
           </a:xfrm>
           <a:prstGeom prst="ellipse">
             <a:avLst/>
           </a:prstGeom>
           <a:solidFill>
-            <a:srgbClr val="D345A9"/>
+            <a:srgbClr val="ED97D3"/>
           </a:solidFill>
           <a:ln w="38100">
             <a:solidFill>
@@ -4635,13 +4800,13 @@
       </p:sp>
       <p:sp>
         <p:nvSpPr>
-          <p:cNvPr id="15" name="TextBox 14"/>
+          <p:cNvPr id="16" name="TextBox 15"/>
           <p:cNvSpPr txBox="1"/>
           <p:nvPr/>
         </p:nvSpPr>
         <p:spPr>
           <a:xfrm>
-            <a:off x="6141567" y="2468880"/>
+            <a:off x="6141567" y="2697480"/>
             <a:ext cx="2636443" cy="457200"/>
           </a:xfrm>
           <a:prstGeom prst="rect">
@@ -4663,7 +4828,7 @@
             <a:r>
               <a:rPr sz="1600" b="1" i="0">
                 <a:solidFill>
-                  <a:srgbClr val="D345A9"/>
+                  <a:srgbClr val="ED97D3"/>
                 </a:solidFill>
               </a:rPr>
               <a:t>첫 가족 여행</a:t>
@@ -4673,13 +4838,13 @@
       </p:sp>
       <p:sp>
         <p:nvSpPr>
-          <p:cNvPr id="16" name="TextBox 15"/>
+          <p:cNvPr id="17" name="TextBox 16"/>
           <p:cNvSpPr txBox="1"/>
           <p:nvPr/>
         </p:nvSpPr>
         <p:spPr>
           <a:xfrm>
-            <a:off x="6187287" y="3657600"/>
+            <a:off x="6187287" y="3886200"/>
             <a:ext cx="2545003" cy="457200"/>
           </a:xfrm>
           <a:prstGeom prst="rect">
@@ -4701,7 +4866,7 @@
             <a:r>
               <a:rPr sz="1800" b="1" i="0">
                 <a:solidFill>
-                  <a:srgbClr val="721D59"/>
+                  <a:srgbClr val="49273F"/>
                 </a:solidFill>
               </a:rPr>
               <a:t>함께 떠난 길</a:t>
@@ -4711,13 +4876,13 @@
       </p:sp>
       <p:sp>
         <p:nvSpPr>
-          <p:cNvPr id="17" name="TextBox 16"/>
+          <p:cNvPr id="18" name="TextBox 17"/>
           <p:cNvSpPr txBox="1"/>
           <p:nvPr/>
         </p:nvSpPr>
         <p:spPr>
           <a:xfrm>
-            <a:off x="6187287" y="4160520"/>
+            <a:off x="6187287" y="4389120"/>
             <a:ext cx="2545003" cy="1645920"/>
           </a:xfrm>
           <a:prstGeom prst="rect">
@@ -4739,7 +4904,7 @@
             <a:r>
               <a:rPr sz="1500" b="0" i="0">
                 <a:solidFill>
-                  <a:srgbClr val="2B2B2B"/>
+                  <a:srgbClr val="26231F"/>
                 </a:solidFill>
               </a:rPr>
               <a:t>가장 웃었던 순간</a:t>
@@ -4749,20 +4914,20 @@
       </p:sp>
       <p:sp>
         <p:nvSpPr>
-          <p:cNvPr id="18" name="때 4"/>
+          <p:cNvPr id="19" name="때 4"/>
           <p:cNvSpPr/>
           <p:nvPr/>
         </p:nvSpPr>
         <p:spPr>
           <a:xfrm>
-            <a:off x="9986505" y="3108960"/>
+            <a:off x="9986505" y="3337560"/>
             <a:ext cx="402336" cy="402336"/>
           </a:xfrm>
           <a:prstGeom prst="ellipse">
             <a:avLst/>
           </a:prstGeom>
           <a:solidFill>
-            <a:srgbClr val="D345A9"/>
+            <a:srgbClr val="ED97D3"/>
           </a:solidFill>
           <a:ln w="38100">
             <a:solidFill>
@@ -4780,13 +4945,13 @@
       </p:sp>
       <p:sp>
         <p:nvSpPr>
-          <p:cNvPr id="19" name="TextBox 18"/>
+          <p:cNvPr id="20" name="TextBox 19"/>
           <p:cNvSpPr txBox="1"/>
           <p:nvPr/>
         </p:nvSpPr>
         <p:spPr>
           <a:xfrm>
-            <a:off x="8869451" y="2468880"/>
+            <a:off x="8869451" y="2697480"/>
             <a:ext cx="2636443" cy="457200"/>
           </a:xfrm>
           <a:prstGeom prst="rect">
@@ -4808,7 +4973,7 @@
             <a:r>
               <a:rPr sz="1600" b="1" i="0">
                 <a:solidFill>
-                  <a:srgbClr val="D345A9"/>
+                  <a:srgbClr val="ED97D3"/>
                 </a:solidFill>
               </a:rPr>
               <a:t>지금</a:t>
@@ -4818,13 +4983,13 @@
       </p:sp>
       <p:sp>
         <p:nvSpPr>
-          <p:cNvPr id="20" name="TextBox 19"/>
+          <p:cNvPr id="21" name="TextBox 20"/>
           <p:cNvSpPr txBox="1"/>
           <p:nvPr/>
         </p:nvSpPr>
         <p:spPr>
           <a:xfrm>
-            <a:off x="8915171" y="3657600"/>
+            <a:off x="8915171" y="3886200"/>
             <a:ext cx="2545003" cy="457200"/>
           </a:xfrm>
           <a:prstGeom prst="rect">
@@ -4846,7 +5011,7 @@
             <a:r>
               <a:rPr sz="1800" b="1" i="0">
                 <a:solidFill>
-                  <a:srgbClr val="721D59"/>
+                  <a:srgbClr val="49273F"/>
                 </a:solidFill>
               </a:rPr>
               <a:t>오늘의 우리</a:t>
@@ -4856,13 +5021,13 @@
       </p:sp>
       <p:sp>
         <p:nvSpPr>
-          <p:cNvPr id="21" name="TextBox 20"/>
+          <p:cNvPr id="22" name="TextBox 21"/>
           <p:cNvSpPr txBox="1"/>
           <p:nvPr/>
         </p:nvSpPr>
         <p:spPr>
           <a:xfrm>
-            <a:off x="8915171" y="4160520"/>
+            <a:off x="8915171" y="4389120"/>
             <a:ext cx="2545003" cy="1645920"/>
           </a:xfrm>
           <a:prstGeom prst="rect">
@@ -4884,7 +5049,7 @@
             <a:r>
               <a:rPr sz="1500" b="0" i="0">
                 <a:solidFill>
-                  <a:srgbClr val="2B2B2B"/>
+                  <a:srgbClr val="26231F"/>
                 </a:solidFill>
               </a:rPr>
               <a:t>요즘 우리 이야기</a:t>
@@ -4906,7 +5071,7 @@
     <p:bg>
       <p:bgPr>
         <a:solidFill>
-          <a:srgbClr val="FFFFFF"/>
+          <a:srgbClr val="FDFAFC"/>
         </a:solidFill>
         <a:effectLst/>
       </p:bgPr>
@@ -4920,20 +5085,20 @@
       <p:grpSpPr/>
       <p:sp>
         <p:nvSpPr>
-          <p:cNvPr id="3" name="장식"/>
+          <p:cNvPr id="3" name="포인트"/>
           <p:cNvSpPr/>
           <p:nvPr/>
         </p:nvSpPr>
         <p:spPr>
           <a:xfrm>
-            <a:off x="-182880" y="6144768"/>
-            <a:ext cx="12557455" cy="731520"/>
-          </a:xfrm>
-          <a:prstGeom prst="wave">
+            <a:off x="5958687" y="246888"/>
+            <a:ext cx="274320" cy="274320"/>
+          </a:xfrm>
+          <a:prstGeom prst="star4">
             <a:avLst/>
           </a:prstGeom>
           <a:solidFill>
-            <a:srgbClr val="F7D4ED"/>
+            <a:srgbClr val="ED97D3"/>
           </a:solidFill>
           <a:ln>
             <a:noFill/>
@@ -4955,14 +5120,14 @@
         </p:nvSpPr>
         <p:spPr>
           <a:xfrm>
-            <a:off x="-182880" y="6400800"/>
-            <a:ext cx="12557455" cy="502920"/>
-          </a:xfrm>
-          <a:prstGeom prst="wave">
+            <a:off x="5684367" y="1572768"/>
+            <a:ext cx="822960" cy="22860"/>
+          </a:xfrm>
+          <a:prstGeom prst="rect">
             <a:avLst/>
           </a:prstGeom>
           <a:solidFill>
-            <a:srgbClr val="D345A9"/>
+            <a:srgbClr val="ED97D3"/>
           </a:solidFill>
           <a:ln>
             <a:noFill/>
@@ -4978,128 +5143,14 @@
       </p:sp>
       <p:sp>
         <p:nvSpPr>
-          <p:cNvPr id="2" name="Title 1"/>
-          <p:cNvSpPr>
-            <a:spLocks noGrp="1"/>
-          </p:cNvSpPr>
-          <p:nvPr>
-            <p:ph type="title"/>
-          </p:nvPr>
-        </p:nvSpPr>
-        <p:spPr>
-          <a:xfrm>
-            <a:off x="640080" y="457200"/>
-            <a:ext cx="9722815" cy="868680"/>
-          </a:xfrm>
-        </p:spPr>
-        <p:txBody>
-          <a:bodyPr wrap="square" lIns="54864" rIns="54864" tIns="27432" bIns="27432" anchor="ctr">
-            <a:noAutofit/>
-          </a:bodyPr>
-          <a:lstStyle/>
-          <a:p>
-            <a:pPr algn="l">
-              <a:lnSpc>
-                <a:spcPct val="105000"/>
-              </a:lnSpc>
-            </a:pPr>
-            <a:r>
-              <a:rPr sz="3000" b="1" i="0">
-                <a:solidFill>
-                  <a:srgbClr val="721D59"/>
-                </a:solidFill>
-              </a:rPr>
-              <a:t>우리 가족의 약속</a:t>
-            </a:r>
-          </a:p>
-        </p:txBody>
-      </p:sp>
-      <p:sp>
-        <p:nvSpPr>
-          <p:cNvPr id="5" name="줄 1"/>
-          <p:cNvSpPr/>
-          <p:nvPr/>
-        </p:nvSpPr>
-        <p:spPr>
-          <a:xfrm>
-            <a:off x="640080" y="1554480"/>
-            <a:ext cx="10911535" cy="1005840"/>
-          </a:xfrm>
-          <a:prstGeom prst="roundRect">
-            <a:avLst>
-              <a:gd name="adj" fmla="val 8000"/>
-            </a:avLst>
-          </a:prstGeom>
-          <a:solidFill>
-            <a:srgbClr val="FCF3F9"/>
-          </a:solidFill>
-          <a:ln w="12700">
-            <a:solidFill>
-              <a:srgbClr val="F7D4ED"/>
-            </a:solidFill>
-          </a:ln>
-        </p:spPr>
-        <p:txBody>
-          <a:bodyPr rtlCol="0" anchor="ctr"/>
-          <a:lstStyle/>
-          <a:p>
-            <a:pPr algn="ctr"/>
-          </a:p>
-        </p:txBody>
-      </p:sp>
-      <p:sp>
-        <p:nvSpPr>
-          <p:cNvPr id="6" name="번호 1"/>
-          <p:cNvSpPr/>
-          <p:nvPr/>
-        </p:nvSpPr>
-        <p:spPr>
-          <a:xfrm>
-            <a:off x="822959" y="1828800"/>
-            <a:ext cx="457200" cy="457200"/>
-          </a:xfrm>
-          <a:prstGeom prst="ellipse">
-            <a:avLst/>
-          </a:prstGeom>
-          <a:solidFill>
-            <a:srgbClr val="D345A9"/>
-          </a:solidFill>
-          <a:ln>
-            <a:noFill/>
-          </a:ln>
-        </p:spPr>
-        <p:txBody>
-          <a:bodyPr rtlCol="0" anchor="ctr" wrap="square" lIns="54864" rIns="54864" tIns="27432" bIns="27432">
-            <a:noAutofit/>
-          </a:bodyPr>
-          <a:lstStyle/>
-          <a:p>
-            <a:pPr algn="ctr">
-              <a:lnSpc>
-                <a:spcPct val="100000"/>
-              </a:lnSpc>
-            </a:pPr>
-            <a:r>
-              <a:rPr sz="1600" b="1" i="0">
-                <a:solidFill>
-                  <a:srgbClr val="FFFFFF"/>
-                </a:solidFill>
-              </a:rPr>
-              <a:t>1</a:t>
-            </a:r>
-          </a:p>
-        </p:txBody>
-      </p:sp>
-      <p:sp>
-        <p:nvSpPr>
-          <p:cNvPr id="7" name="TextBox 6"/>
+          <p:cNvPr id="5" name="상단 라벨"/>
           <p:cNvSpPr txBox="1"/>
           <p:nvPr/>
         </p:nvSpPr>
         <p:spPr>
           <a:xfrm>
-            <a:off x="1508760" y="1600200"/>
-            <a:ext cx="2743200" cy="914400"/>
+            <a:off x="640080" y="182880"/>
+            <a:ext cx="3657600" cy="274320"/>
           </a:xfrm>
           <a:prstGeom prst="rect">
             <a:avLst/>
@@ -5118,26 +5169,95 @@
               </a:lnSpc>
             </a:pPr>
             <a:r>
-              <a:rPr sz="1800" b="1" i="0">
-                <a:solidFill>
-                  <a:srgbClr val="721D59"/>
+              <a:rPr sz="800" b="1" i="0" spc="250">
+                <a:solidFill>
+                  <a:srgbClr val="8E8780"/>
                 </a:solidFill>
               </a:rPr>
-              <a:t>약속 1</a:t>
-            </a:r>
-          </a:p>
-        </p:txBody>
-      </p:sp>
-      <p:sp>
-        <p:nvSpPr>
-          <p:cNvPr id="8" name="TextBox 7"/>
+              <a:t>FAMILY ALBUM</a:t>
+            </a:r>
+          </a:p>
+        </p:txBody>
+      </p:sp>
+      <p:sp>
+        <p:nvSpPr>
+          <p:cNvPr id="2" name="Title 1"/>
+          <p:cNvSpPr>
+            <a:spLocks noGrp="1"/>
+          </p:cNvSpPr>
+          <p:nvPr>
+            <p:ph type="title"/>
+          </p:nvPr>
+        </p:nvSpPr>
+        <p:spPr>
+          <a:xfrm>
+            <a:off x="1371600" y="640080"/>
+            <a:ext cx="9448495" cy="868680"/>
+          </a:xfrm>
+        </p:spPr>
+        <p:txBody>
+          <a:bodyPr wrap="square" lIns="54864" rIns="54864" tIns="27432" bIns="27432" anchor="ctr">
+            <a:noAutofit/>
+          </a:bodyPr>
+          <a:lstStyle/>
+          <a:p>
+            <a:pPr algn="ctr">
+              <a:lnSpc>
+                <a:spcPct val="105000"/>
+              </a:lnSpc>
+            </a:pPr>
+            <a:r>
+              <a:rPr sz="3000" b="1" i="0">
+                <a:solidFill>
+                  <a:srgbClr val="26231F"/>
+                </a:solidFill>
+              </a:rPr>
+              <a:t>우리 가족의 약속</a:t>
+            </a:r>
+          </a:p>
+        </p:txBody>
+      </p:sp>
+      <p:sp>
+        <p:nvSpPr>
+          <p:cNvPr id="6" name="줄 1"/>
+          <p:cNvSpPr/>
+          <p:nvPr/>
+        </p:nvSpPr>
+        <p:spPr>
+          <a:xfrm>
+            <a:off x="640080" y="1783080"/>
+            <a:ext cx="10911535" cy="1005840"/>
+          </a:xfrm>
+          <a:prstGeom prst="roundRect">
+            <a:avLst>
+              <a:gd name="adj" fmla="val 7000"/>
+            </a:avLst>
+          </a:prstGeom>
+          <a:noFill/>
+          <a:ln w="15875">
+            <a:solidFill>
+              <a:srgbClr val="ED97D3"/>
+            </a:solidFill>
+          </a:ln>
+        </p:spPr>
+        <p:txBody>
+          <a:bodyPr rtlCol="0" anchor="ctr"/>
+          <a:lstStyle/>
+          <a:p>
+            <a:pPr algn="ctr"/>
+          </a:p>
+        </p:txBody>
+      </p:sp>
+      <p:sp>
+        <p:nvSpPr>
+          <p:cNvPr id="7" name="번호 1"/>
           <p:cNvSpPr txBox="1"/>
           <p:nvPr/>
         </p:nvSpPr>
         <p:spPr>
           <a:xfrm>
-            <a:off x="4297680" y="1600200"/>
-            <a:ext cx="7071055" cy="914400"/>
+            <a:off x="731519" y="2011680"/>
+            <a:ext cx="914400" cy="548640"/>
           </a:xfrm>
           <a:prstGeom prst="rect">
             <a:avLst/>
@@ -5156,101 +5276,25 @@
               </a:lnSpc>
             </a:pPr>
             <a:r>
-              <a:rPr sz="1700" b="0" i="0">
-                <a:solidFill>
-                  <a:srgbClr val="2B2B2B"/>
+              <a:rPr sz="2400" b="1" i="0">
+                <a:solidFill>
+                  <a:srgbClr val="ED97D3"/>
                 </a:solidFill>
               </a:rPr>
-              <a:t>밥은 꼭 함께 먹기</a:t>
-            </a:r>
-          </a:p>
-        </p:txBody>
-      </p:sp>
-      <p:sp>
-        <p:nvSpPr>
-          <p:cNvPr id="9" name="줄 2"/>
-          <p:cNvSpPr/>
-          <p:nvPr/>
-        </p:nvSpPr>
-        <p:spPr>
-          <a:xfrm>
-            <a:off x="640080" y="2697480"/>
-            <a:ext cx="10911535" cy="1005840"/>
-          </a:xfrm>
-          <a:prstGeom prst="roundRect">
-            <a:avLst>
-              <a:gd name="adj" fmla="val 8000"/>
-            </a:avLst>
-          </a:prstGeom>
-          <a:solidFill>
-            <a:srgbClr val="FCF3F9"/>
-          </a:solidFill>
-          <a:ln w="12700">
-            <a:solidFill>
-              <a:srgbClr val="F7D4ED"/>
-            </a:solidFill>
-          </a:ln>
-        </p:spPr>
-        <p:txBody>
-          <a:bodyPr rtlCol="0" anchor="ctr"/>
-          <a:lstStyle/>
-          <a:p>
-            <a:pPr algn="ctr"/>
-          </a:p>
-        </p:txBody>
-      </p:sp>
-      <p:sp>
-        <p:nvSpPr>
-          <p:cNvPr id="10" name="번호 2"/>
-          <p:cNvSpPr/>
-          <p:nvPr/>
-        </p:nvSpPr>
-        <p:spPr>
-          <a:xfrm>
-            <a:off x="822959" y="2971800"/>
-            <a:ext cx="457200" cy="457200"/>
-          </a:xfrm>
-          <a:prstGeom prst="ellipse">
-            <a:avLst/>
-          </a:prstGeom>
-          <a:solidFill>
-            <a:srgbClr val="D345A9"/>
-          </a:solidFill>
-          <a:ln>
-            <a:noFill/>
-          </a:ln>
-        </p:spPr>
-        <p:txBody>
-          <a:bodyPr rtlCol="0" anchor="ctr" wrap="square" lIns="54864" rIns="54864" tIns="27432" bIns="27432">
-            <a:noAutofit/>
-          </a:bodyPr>
-          <a:lstStyle/>
-          <a:p>
-            <a:pPr algn="ctr">
-              <a:lnSpc>
-                <a:spcPct val="100000"/>
-              </a:lnSpc>
-            </a:pPr>
-            <a:r>
-              <a:rPr sz="1600" b="1" i="0">
-                <a:solidFill>
-                  <a:srgbClr val="FFFFFF"/>
-                </a:solidFill>
-              </a:rPr>
-              <a:t>2</a:t>
-            </a:r>
-          </a:p>
-        </p:txBody>
-      </p:sp>
-      <p:sp>
-        <p:nvSpPr>
-          <p:cNvPr id="11" name="TextBox 10"/>
+              <a:t>01</a:t>
+            </a:r>
+          </a:p>
+        </p:txBody>
+      </p:sp>
+      <p:sp>
+        <p:nvSpPr>
+          <p:cNvPr id="8" name="TextBox 7"/>
           <p:cNvSpPr txBox="1"/>
           <p:nvPr/>
         </p:nvSpPr>
         <p:spPr>
           <a:xfrm>
-            <a:off x="1508760" y="2743200"/>
+            <a:off x="1508760" y="1828800"/>
             <a:ext cx="2743200" cy="914400"/>
           </a:xfrm>
           <a:prstGeom prst="rect">
@@ -5272,23 +5316,23 @@
             <a:r>
               <a:rPr sz="1800" b="1" i="0">
                 <a:solidFill>
-                  <a:srgbClr val="721D59"/>
+                  <a:srgbClr val="49273F"/>
                 </a:solidFill>
               </a:rPr>
-              <a:t>약속 2</a:t>
-            </a:r>
-          </a:p>
-        </p:txBody>
-      </p:sp>
-      <p:sp>
-        <p:nvSpPr>
-          <p:cNvPr id="12" name="TextBox 11"/>
+              <a:t>약속 1</a:t>
+            </a:r>
+          </a:p>
+        </p:txBody>
+      </p:sp>
+      <p:sp>
+        <p:nvSpPr>
+          <p:cNvPr id="9" name="TextBox 8"/>
           <p:cNvSpPr txBox="1"/>
           <p:nvPr/>
         </p:nvSpPr>
         <p:spPr>
           <a:xfrm>
-            <a:off x="4297680" y="2743200"/>
+            <a:off x="4297680" y="1828800"/>
             <a:ext cx="7071055" cy="914400"/>
           </a:xfrm>
           <a:prstGeom prst="rect">
@@ -5310,36 +5354,34 @@
             <a:r>
               <a:rPr sz="1700" b="0" i="0">
                 <a:solidFill>
-                  <a:srgbClr val="2B2B2B"/>
+                  <a:srgbClr val="26231F"/>
                 </a:solidFill>
               </a:rPr>
-              <a:t>잠들기 전에 사랑한다고 말하기</a:t>
-            </a:r>
-          </a:p>
-        </p:txBody>
-      </p:sp>
-      <p:sp>
-        <p:nvSpPr>
-          <p:cNvPr id="13" name="줄 3"/>
+              <a:t>밥은 꼭 함께 먹기</a:t>
+            </a:r>
+          </a:p>
+        </p:txBody>
+      </p:sp>
+      <p:sp>
+        <p:nvSpPr>
+          <p:cNvPr id="10" name="줄 2"/>
           <p:cNvSpPr/>
           <p:nvPr/>
         </p:nvSpPr>
         <p:spPr>
           <a:xfrm>
-            <a:off x="640080" y="3840480"/>
+            <a:off x="640080" y="2926080"/>
             <a:ext cx="10911535" cy="1005840"/>
           </a:xfrm>
           <a:prstGeom prst="roundRect">
             <a:avLst>
-              <a:gd name="adj" fmla="val 8000"/>
+              <a:gd name="adj" fmla="val 7000"/>
             </a:avLst>
           </a:prstGeom>
-          <a:solidFill>
-            <a:srgbClr val="FCF3F9"/>
-          </a:solidFill>
-          <a:ln w="12700">
+          <a:noFill/>
+          <a:ln w="15875">
             <a:solidFill>
-              <a:srgbClr val="F7D4ED"/>
+              <a:srgbClr val="ED97D3"/>
             </a:solidFill>
           </a:ln>
         </p:spPr>
@@ -5353,57 +5395,14 @@
       </p:sp>
       <p:sp>
         <p:nvSpPr>
-          <p:cNvPr id="14" name="번호 3"/>
-          <p:cNvSpPr/>
-          <p:nvPr/>
-        </p:nvSpPr>
-        <p:spPr>
-          <a:xfrm>
-            <a:off x="822959" y="4114800"/>
-            <a:ext cx="457200" cy="457200"/>
-          </a:xfrm>
-          <a:prstGeom prst="ellipse">
-            <a:avLst/>
-          </a:prstGeom>
-          <a:solidFill>
-            <a:srgbClr val="D345A9"/>
-          </a:solidFill>
-          <a:ln>
-            <a:noFill/>
-          </a:ln>
-        </p:spPr>
-        <p:txBody>
-          <a:bodyPr rtlCol="0" anchor="ctr" wrap="square" lIns="54864" rIns="54864" tIns="27432" bIns="27432">
-            <a:noAutofit/>
-          </a:bodyPr>
-          <a:lstStyle/>
-          <a:p>
-            <a:pPr algn="ctr">
-              <a:lnSpc>
-                <a:spcPct val="100000"/>
-              </a:lnSpc>
-            </a:pPr>
-            <a:r>
-              <a:rPr sz="1600" b="1" i="0">
-                <a:solidFill>
-                  <a:srgbClr val="FFFFFF"/>
-                </a:solidFill>
-              </a:rPr>
-              <a:t>3</a:t>
-            </a:r>
-          </a:p>
-        </p:txBody>
-      </p:sp>
-      <p:sp>
-        <p:nvSpPr>
-          <p:cNvPr id="15" name="TextBox 14"/>
+          <p:cNvPr id="11" name="번호 2"/>
           <p:cNvSpPr txBox="1"/>
           <p:nvPr/>
         </p:nvSpPr>
         <p:spPr>
           <a:xfrm>
-            <a:off x="1508760" y="3886200"/>
-            <a:ext cx="2743200" cy="914400"/>
+            <a:off x="731519" y="3154680"/>
+            <a:ext cx="914400" cy="548640"/>
           </a:xfrm>
           <a:prstGeom prst="rect">
             <a:avLst/>
@@ -5422,26 +5421,26 @@
               </a:lnSpc>
             </a:pPr>
             <a:r>
-              <a:rPr sz="1800" b="1" i="0">
-                <a:solidFill>
-                  <a:srgbClr val="721D59"/>
+              <a:rPr sz="2400" b="1" i="0">
+                <a:solidFill>
+                  <a:srgbClr val="ED97D3"/>
                 </a:solidFill>
               </a:rPr>
-              <a:t>약속 3</a:t>
-            </a:r>
-          </a:p>
-        </p:txBody>
-      </p:sp>
-      <p:sp>
-        <p:nvSpPr>
-          <p:cNvPr id="16" name="TextBox 15"/>
+              <a:t>02</a:t>
+            </a:r>
+          </a:p>
+        </p:txBody>
+      </p:sp>
+      <p:sp>
+        <p:nvSpPr>
+          <p:cNvPr id="12" name="TextBox 11"/>
           <p:cNvSpPr txBox="1"/>
           <p:nvPr/>
         </p:nvSpPr>
         <p:spPr>
           <a:xfrm>
-            <a:off x="4297680" y="3886200"/>
-            <a:ext cx="7071055" cy="914400"/>
+            <a:off x="1508760" y="2971800"/>
+            <a:ext cx="2743200" cy="914400"/>
           </a:xfrm>
           <a:prstGeom prst="rect">
             <a:avLst/>
@@ -5460,9 +5459,192 @@
               </a:lnSpc>
             </a:pPr>
             <a:r>
+              <a:rPr sz="1800" b="1" i="0">
+                <a:solidFill>
+                  <a:srgbClr val="49273F"/>
+                </a:solidFill>
+              </a:rPr>
+              <a:t>약속 2</a:t>
+            </a:r>
+          </a:p>
+        </p:txBody>
+      </p:sp>
+      <p:sp>
+        <p:nvSpPr>
+          <p:cNvPr id="13" name="TextBox 12"/>
+          <p:cNvSpPr txBox="1"/>
+          <p:nvPr/>
+        </p:nvSpPr>
+        <p:spPr>
+          <a:xfrm>
+            <a:off x="4297680" y="2971800"/>
+            <a:ext cx="7071055" cy="914400"/>
+          </a:xfrm>
+          <a:prstGeom prst="rect">
+            <a:avLst/>
+          </a:prstGeom>
+          <a:noFill/>
+        </p:spPr>
+        <p:txBody>
+          <a:bodyPr wrap="square" lIns="54864" rIns="54864" tIns="27432" bIns="27432" anchor="ctr">
+            <a:noAutofit/>
+          </a:bodyPr>
+          <a:lstStyle/>
+          <a:p>
+            <a:pPr algn="l">
+              <a:lnSpc>
+                <a:spcPct val="115000"/>
+              </a:lnSpc>
+            </a:pPr>
+            <a:r>
               <a:rPr sz="1700" b="0" i="0">
                 <a:solidFill>
-                  <a:srgbClr val="2B2B2B"/>
+                  <a:srgbClr val="26231F"/>
+                </a:solidFill>
+              </a:rPr>
+              <a:t>잠들기 전에 사랑한다고 말하기</a:t>
+            </a:r>
+          </a:p>
+        </p:txBody>
+      </p:sp>
+      <p:sp>
+        <p:nvSpPr>
+          <p:cNvPr id="14" name="줄 3"/>
+          <p:cNvSpPr/>
+          <p:nvPr/>
+        </p:nvSpPr>
+        <p:spPr>
+          <a:xfrm>
+            <a:off x="640080" y="4069080"/>
+            <a:ext cx="10911535" cy="1005840"/>
+          </a:xfrm>
+          <a:prstGeom prst="roundRect">
+            <a:avLst>
+              <a:gd name="adj" fmla="val 7000"/>
+            </a:avLst>
+          </a:prstGeom>
+          <a:noFill/>
+          <a:ln w="15875">
+            <a:solidFill>
+              <a:srgbClr val="ED97D3"/>
+            </a:solidFill>
+          </a:ln>
+        </p:spPr>
+        <p:txBody>
+          <a:bodyPr rtlCol="0" anchor="ctr"/>
+          <a:lstStyle/>
+          <a:p>
+            <a:pPr algn="ctr"/>
+          </a:p>
+        </p:txBody>
+      </p:sp>
+      <p:sp>
+        <p:nvSpPr>
+          <p:cNvPr id="15" name="번호 3"/>
+          <p:cNvSpPr txBox="1"/>
+          <p:nvPr/>
+        </p:nvSpPr>
+        <p:spPr>
+          <a:xfrm>
+            <a:off x="731519" y="4297680"/>
+            <a:ext cx="914400" cy="548640"/>
+          </a:xfrm>
+          <a:prstGeom prst="rect">
+            <a:avLst/>
+          </a:prstGeom>
+          <a:noFill/>
+        </p:spPr>
+        <p:txBody>
+          <a:bodyPr wrap="square" lIns="54864" rIns="54864" tIns="27432" bIns="27432" anchor="ctr">
+            <a:noAutofit/>
+          </a:bodyPr>
+          <a:lstStyle/>
+          <a:p>
+            <a:pPr algn="l">
+              <a:lnSpc>
+                <a:spcPct val="115000"/>
+              </a:lnSpc>
+            </a:pPr>
+            <a:r>
+              <a:rPr sz="2400" b="1" i="0">
+                <a:solidFill>
+                  <a:srgbClr val="ED97D3"/>
+                </a:solidFill>
+              </a:rPr>
+              <a:t>03</a:t>
+            </a:r>
+          </a:p>
+        </p:txBody>
+      </p:sp>
+      <p:sp>
+        <p:nvSpPr>
+          <p:cNvPr id="16" name="TextBox 15"/>
+          <p:cNvSpPr txBox="1"/>
+          <p:nvPr/>
+        </p:nvSpPr>
+        <p:spPr>
+          <a:xfrm>
+            <a:off x="1508760" y="4114800"/>
+            <a:ext cx="2743200" cy="914400"/>
+          </a:xfrm>
+          <a:prstGeom prst="rect">
+            <a:avLst/>
+          </a:prstGeom>
+          <a:noFill/>
+        </p:spPr>
+        <p:txBody>
+          <a:bodyPr wrap="square" lIns="54864" rIns="54864" tIns="27432" bIns="27432" anchor="ctr">
+            <a:noAutofit/>
+          </a:bodyPr>
+          <a:lstStyle/>
+          <a:p>
+            <a:pPr algn="l">
+              <a:lnSpc>
+                <a:spcPct val="115000"/>
+              </a:lnSpc>
+            </a:pPr>
+            <a:r>
+              <a:rPr sz="1800" b="1" i="0">
+                <a:solidFill>
+                  <a:srgbClr val="49273F"/>
+                </a:solidFill>
+              </a:rPr>
+              <a:t>약속 3</a:t>
+            </a:r>
+          </a:p>
+        </p:txBody>
+      </p:sp>
+      <p:sp>
+        <p:nvSpPr>
+          <p:cNvPr id="17" name="TextBox 16"/>
+          <p:cNvSpPr txBox="1"/>
+          <p:nvPr/>
+        </p:nvSpPr>
+        <p:spPr>
+          <a:xfrm>
+            <a:off x="4297680" y="4114800"/>
+            <a:ext cx="7071055" cy="914400"/>
+          </a:xfrm>
+          <a:prstGeom prst="rect">
+            <a:avLst/>
+          </a:prstGeom>
+          <a:noFill/>
+        </p:spPr>
+        <p:txBody>
+          <a:bodyPr wrap="square" lIns="54864" rIns="54864" tIns="27432" bIns="27432" anchor="ctr">
+            <a:noAutofit/>
+          </a:bodyPr>
+          <a:lstStyle/>
+          <a:p>
+            <a:pPr algn="l">
+              <a:lnSpc>
+                <a:spcPct val="115000"/>
+              </a:lnSpc>
+            </a:pPr>
+            <a:r>
+              <a:rPr sz="1700" b="0" i="0">
+                <a:solidFill>
+                  <a:srgbClr val="26231F"/>
                 </a:solidFill>
               </a:rPr>
               <a:t>주말에는 함께 산책하기</a:t>
@@ -5484,7 +5666,7 @@
     <p:bg>
       <p:bgPr>
         <a:solidFill>
-          <a:srgbClr val="FFFFFF"/>
+          <a:srgbClr val="FDFAFC"/>
         </a:solidFill>
         <a:effectLst/>
       </p:bgPr>
@@ -5498,20 +5680,20 @@
       <p:grpSpPr/>
       <p:sp>
         <p:nvSpPr>
-          <p:cNvPr id="3" name="장식"/>
+          <p:cNvPr id="3" name="포인트"/>
           <p:cNvSpPr/>
           <p:nvPr/>
         </p:nvSpPr>
         <p:spPr>
           <a:xfrm>
-            <a:off x="-182880" y="6144768"/>
-            <a:ext cx="12557455" cy="731520"/>
-          </a:xfrm>
-          <a:prstGeom prst="wave">
+            <a:off x="5958687" y="246888"/>
+            <a:ext cx="274320" cy="274320"/>
+          </a:xfrm>
+          <a:prstGeom prst="star4">
             <a:avLst/>
           </a:prstGeom>
           <a:solidFill>
-            <a:srgbClr val="F7D4ED"/>
+            <a:srgbClr val="ED97D3"/>
           </a:solidFill>
           <a:ln>
             <a:noFill/>
@@ -5533,14 +5715,14 @@
         </p:nvSpPr>
         <p:spPr>
           <a:xfrm>
-            <a:off x="-182880" y="6400800"/>
-            <a:ext cx="12557455" cy="502920"/>
-          </a:xfrm>
-          <a:prstGeom prst="wave">
+            <a:off x="5684367" y="1572768"/>
+            <a:ext cx="822960" cy="22860"/>
+          </a:xfrm>
+          <a:prstGeom prst="rect">
             <a:avLst/>
           </a:prstGeom>
           <a:solidFill>
-            <a:srgbClr val="D345A9"/>
+            <a:srgbClr val="ED97D3"/>
           </a:solidFill>
           <a:ln>
             <a:noFill/>
@@ -5556,19 +5738,19 @@
       </p:sp>
       <p:sp>
         <p:nvSpPr>
-          <p:cNvPr id="2" name="Title 1"/>
-          <p:cNvSpPr>
-            <a:spLocks noGrp="1"/>
-          </p:cNvSpPr>
-          <p:nvPr>
-            <p:ph type="title"/>
-          </p:nvPr>
-        </p:nvSpPr>
-        <p:spPr>
-          <a:xfrm>
-            <a:off x="640080" y="457200"/>
-            <a:ext cx="9722815" cy="868680"/>
-          </a:xfrm>
+          <p:cNvPr id="5" name="상단 라벨"/>
+          <p:cNvSpPr txBox="1"/>
+          <p:nvPr/>
+        </p:nvSpPr>
+        <p:spPr>
+          <a:xfrm>
+            <a:off x="640080" y="182880"/>
+            <a:ext cx="3657600" cy="274320"/>
+          </a:xfrm>
+          <a:prstGeom prst="rect">
+            <a:avLst/>
+          </a:prstGeom>
+          <a:noFill/>
         </p:spPr>
         <p:txBody>
           <a:bodyPr wrap="square" lIns="54864" rIns="54864" tIns="27432" bIns="27432" anchor="ctr">
@@ -5577,6 +5759,44 @@
           <a:lstStyle/>
           <a:p>
             <a:pPr algn="l">
+              <a:lnSpc>
+                <a:spcPct val="115000"/>
+              </a:lnSpc>
+            </a:pPr>
+            <a:r>
+              <a:rPr sz="800" b="1" i="0" spc="250">
+                <a:solidFill>
+                  <a:srgbClr val="8E8780"/>
+                </a:solidFill>
+              </a:rPr>
+              <a:t>FAMILY ALBUM</a:t>
+            </a:r>
+          </a:p>
+        </p:txBody>
+      </p:sp>
+      <p:sp>
+        <p:nvSpPr>
+          <p:cNvPr id="2" name="Title 1"/>
+          <p:cNvSpPr>
+            <a:spLocks noGrp="1"/>
+          </p:cNvSpPr>
+          <p:nvPr>
+            <p:ph type="title"/>
+          </p:nvPr>
+        </p:nvSpPr>
+        <p:spPr>
+          <a:xfrm>
+            <a:off x="1371600" y="640080"/>
+            <a:ext cx="9448495" cy="868680"/>
+          </a:xfrm>
+        </p:spPr>
+        <p:txBody>
+          <a:bodyPr wrap="square" lIns="54864" rIns="54864" tIns="27432" bIns="27432" anchor="ctr">
+            <a:noAutofit/>
+          </a:bodyPr>
+          <a:lstStyle/>
+          <a:p>
+            <a:pPr algn="ctr">
               <a:lnSpc>
                 <a:spcPct val="105000"/>
               </a:lnSpc>
@@ -5584,7 +5804,7 @@
             <a:r>
               <a:rPr sz="3000" b="1" i="0">
                 <a:solidFill>
-                  <a:srgbClr val="721D59"/>
+                  <a:srgbClr val="26231F"/>
                 </a:solidFill>
               </a:rPr>
               <a:t>가족 사진</a:t>
@@ -5594,14 +5814,14 @@
       </p:sp>
       <p:sp>
         <p:nvSpPr>
-          <p:cNvPr id="5" name="사진 자리"/>
+          <p:cNvPr id="6" name="사진 자리"/>
           <p:cNvSpPr/>
           <p:nvPr/>
         </p:nvSpPr>
         <p:spPr>
           <a:xfrm>
-            <a:off x="640080" y="1554480"/>
-            <a:ext cx="3515258" cy="2103120"/>
+            <a:off x="640080" y="1783080"/>
+            <a:ext cx="3515258" cy="2194560"/>
           </a:xfrm>
           <a:prstGeom prst="roundRect">
             <a:avLst>
@@ -5609,12 +5829,10 @@
             </a:avLst>
           </a:prstGeom>
           <a:solidFill>
-            <a:srgbClr val="F7D4ED"/>
+            <a:srgbClr val="FAD1EE"/>
           </a:solidFill>
           <a:ln w="19050">
-            <a:solidFill>
-              <a:srgbClr val="D345A9"/>
-            </a:solidFill>
+            <a:noFill/>
             <a:prstDash val="dash"/>
           </a:ln>
         </p:spPr>
@@ -5632,7 +5850,7 @@
             <a:r>
               <a:rPr sz="1200" b="0" i="0">
                 <a:solidFill>
-                  <a:srgbClr val="721D59"/>
+                  <a:srgbClr val="8E8780"/>
                 </a:solidFill>
               </a:rPr>
               <a:t>사진 1</a:t>
@@ -5642,14 +5860,14 @@
       </p:sp>
       <p:sp>
         <p:nvSpPr>
-          <p:cNvPr id="6" name="사진 자리"/>
+          <p:cNvPr id="7" name="사진 자리"/>
           <p:cNvSpPr/>
           <p:nvPr/>
         </p:nvSpPr>
         <p:spPr>
           <a:xfrm>
-            <a:off x="4338218" y="1554480"/>
-            <a:ext cx="3515258" cy="2103120"/>
+            <a:off x="4338218" y="1783080"/>
+            <a:ext cx="3515258" cy="2194560"/>
           </a:xfrm>
           <a:prstGeom prst="roundRect">
             <a:avLst>
@@ -5657,12 +5875,10 @@
             </a:avLst>
           </a:prstGeom>
           <a:solidFill>
-            <a:srgbClr val="F7D4ED"/>
+            <a:srgbClr val="FAD1EE"/>
           </a:solidFill>
           <a:ln w="19050">
-            <a:solidFill>
-              <a:srgbClr val="D345A9"/>
-            </a:solidFill>
+            <a:noFill/>
             <a:prstDash val="dash"/>
           </a:ln>
         </p:spPr>
@@ -5680,7 +5896,7 @@
             <a:r>
               <a:rPr sz="1200" b="0" i="0">
                 <a:solidFill>
-                  <a:srgbClr val="721D59"/>
+                  <a:srgbClr val="8E8780"/>
                 </a:solidFill>
               </a:rPr>
               <a:t>사진 2</a:t>
@@ -5690,14 +5906,14 @@
       </p:sp>
       <p:sp>
         <p:nvSpPr>
-          <p:cNvPr id="7" name="사진 자리"/>
+          <p:cNvPr id="8" name="사진 자리"/>
           <p:cNvSpPr/>
           <p:nvPr/>
         </p:nvSpPr>
         <p:spPr>
           <a:xfrm>
-            <a:off x="8036356" y="1554480"/>
-            <a:ext cx="3515258" cy="2103120"/>
+            <a:off x="8036356" y="1783080"/>
+            <a:ext cx="3515258" cy="2194560"/>
           </a:xfrm>
           <a:prstGeom prst="roundRect">
             <a:avLst>
@@ -5705,12 +5921,10 @@
             </a:avLst>
           </a:prstGeom>
           <a:solidFill>
-            <a:srgbClr val="F7D4ED"/>
+            <a:srgbClr val="FAD1EE"/>
           </a:solidFill>
           <a:ln w="19050">
-            <a:solidFill>
-              <a:srgbClr val="D345A9"/>
-            </a:solidFill>
+            <a:noFill/>
             <a:prstDash val="dash"/>
           </a:ln>
         </p:spPr>
@@ -5728,7 +5942,7 @@
             <a:r>
               <a:rPr sz="1200" b="0" i="0">
                 <a:solidFill>
-                  <a:srgbClr val="721D59"/>
+                  <a:srgbClr val="8E8780"/>
                 </a:solidFill>
               </a:rPr>
               <a:t>사진 3</a:t>
@@ -5738,14 +5952,14 @@
       </p:sp>
       <p:sp>
         <p:nvSpPr>
-          <p:cNvPr id="8" name="사진 자리"/>
+          <p:cNvPr id="9" name="사진 자리"/>
           <p:cNvSpPr/>
           <p:nvPr/>
         </p:nvSpPr>
         <p:spPr>
           <a:xfrm>
-            <a:off x="640080" y="3840480"/>
-            <a:ext cx="3515258" cy="2103120"/>
+            <a:off x="640080" y="4160520"/>
+            <a:ext cx="3515258" cy="2194560"/>
           </a:xfrm>
           <a:prstGeom prst="roundRect">
             <a:avLst>
@@ -5753,12 +5967,10 @@
             </a:avLst>
           </a:prstGeom>
           <a:solidFill>
-            <a:srgbClr val="F7D4ED"/>
+            <a:srgbClr val="FAD1EE"/>
           </a:solidFill>
           <a:ln w="19050">
-            <a:solidFill>
-              <a:srgbClr val="D345A9"/>
-            </a:solidFill>
+            <a:noFill/>
             <a:prstDash val="dash"/>
           </a:ln>
         </p:spPr>
@@ -5776,7 +5988,7 @@
             <a:r>
               <a:rPr sz="1200" b="0" i="0">
                 <a:solidFill>
-                  <a:srgbClr val="721D59"/>
+                  <a:srgbClr val="8E8780"/>
                 </a:solidFill>
               </a:rPr>
               <a:t>사진 4</a:t>
@@ -5786,14 +5998,14 @@
       </p:sp>
       <p:sp>
         <p:nvSpPr>
-          <p:cNvPr id="9" name="사진 자리"/>
+          <p:cNvPr id="10" name="사진 자리"/>
           <p:cNvSpPr/>
           <p:nvPr/>
         </p:nvSpPr>
         <p:spPr>
           <a:xfrm>
-            <a:off x="4338218" y="3840480"/>
-            <a:ext cx="3515258" cy="2103120"/>
+            <a:off x="4338218" y="4160520"/>
+            <a:ext cx="3515258" cy="2194560"/>
           </a:xfrm>
           <a:prstGeom prst="roundRect">
             <a:avLst>
@@ -5801,12 +6013,10 @@
             </a:avLst>
           </a:prstGeom>
           <a:solidFill>
-            <a:srgbClr val="F7D4ED"/>
+            <a:srgbClr val="FAD1EE"/>
           </a:solidFill>
           <a:ln w="19050">
-            <a:solidFill>
-              <a:srgbClr val="D345A9"/>
-            </a:solidFill>
+            <a:noFill/>
             <a:prstDash val="dash"/>
           </a:ln>
         </p:spPr>
@@ -5824,7 +6034,7 @@
             <a:r>
               <a:rPr sz="1200" b="0" i="0">
                 <a:solidFill>
-                  <a:srgbClr val="721D59"/>
+                  <a:srgbClr val="8E8780"/>
                 </a:solidFill>
               </a:rPr>
               <a:t>사진 5</a:t>
@@ -5834,14 +6044,14 @@
       </p:sp>
       <p:sp>
         <p:nvSpPr>
-          <p:cNvPr id="10" name="사진 자리"/>
+          <p:cNvPr id="11" name="사진 자리"/>
           <p:cNvSpPr/>
           <p:nvPr/>
         </p:nvSpPr>
         <p:spPr>
           <a:xfrm>
-            <a:off x="8036356" y="3840480"/>
-            <a:ext cx="3515258" cy="2103120"/>
+            <a:off x="8036356" y="4160520"/>
+            <a:ext cx="3515258" cy="2194560"/>
           </a:xfrm>
           <a:prstGeom prst="roundRect">
             <a:avLst>
@@ -5849,12 +6059,10 @@
             </a:avLst>
           </a:prstGeom>
           <a:solidFill>
-            <a:srgbClr val="F7D4ED"/>
+            <a:srgbClr val="FAD1EE"/>
           </a:solidFill>
           <a:ln w="19050">
-            <a:solidFill>
-              <a:srgbClr val="D345A9"/>
-            </a:solidFill>
+            <a:noFill/>
             <a:prstDash val="dash"/>
           </a:ln>
         </p:spPr>
@@ -5872,7 +6080,7 @@
             <a:r>
               <a:rPr sz="1200" b="0" i="0">
                 <a:solidFill>
-                  <a:srgbClr val="721D59"/>
+                  <a:srgbClr val="8E8780"/>
                 </a:solidFill>
               </a:rPr>
               <a:t>사진 6</a:t>
@@ -5891,6 +6099,14 @@
 <file path=ppt/slides/slide6.xml><?xml version="1.0" encoding="utf-8"?>
 <p:sld xmlns:a="http://schemas.openxmlformats.org/drawingml/2006/main" xmlns:p="http://schemas.openxmlformats.org/presentationml/2006/main" xmlns:r="http://schemas.openxmlformats.org/officeDocument/2006/relationships">
   <p:cSld>
+    <p:bg>
+      <p:bgPr>
+        <a:solidFill>
+          <a:srgbClr val="FDEAF7"/>
+        </a:solidFill>
+        <a:effectLst/>
+      </p:bgPr>
+    </p:bg>
     <p:spTree>
       <p:nvGrpSpPr>
         <p:cNvPr id="1" name=""/>
@@ -5898,30 +6114,119 @@
         <p:nvPr/>
       </p:nvGrpSpPr>
       <p:grpSpPr/>
-      <p:pic>
-        <p:nvPicPr>
-          <p:cNvPr id="3" name="표지 그림" descr="family-07.jpg"/>
-          <p:cNvPicPr>
-            <a:picLocks noChangeAspect="1"/>
-          </p:cNvPicPr>
-          <p:nvPr/>
-        </p:nvPicPr>
-        <p:blipFill>
-          <a:blip r:embed="rId2"/>
-          <a:stretch>
-            <a:fillRect/>
-          </a:stretch>
-        </p:blipFill>
-        <p:spPr>
-          <a:xfrm>
-            <a:off x="0" y="0"/>
-            <a:ext cx="12191695" cy="6858000"/>
+      <p:sp>
+        <p:nvSpPr>
+          <p:cNvPr id="3" name="사진 자리"/>
+          <p:cNvSpPr/>
+          <p:nvPr/>
+        </p:nvSpPr>
+        <p:spPr>
+          <a:xfrm>
+            <a:off x="7558851" y="685800"/>
+            <a:ext cx="3169840" cy="5486400"/>
+          </a:xfrm>
+          <a:prstGeom prst="round2SameRect">
+            <a:avLst>
+              <a:gd name="adj1" fmla="val 50000"/>
+              <a:gd name="adj2" fmla="val 0"/>
+            </a:avLst>
+          </a:prstGeom>
+          <a:solidFill>
+            <a:srgbClr val="F2A6DB"/>
+          </a:solidFill>
+          <a:ln>
+            <a:noFill/>
+          </a:ln>
+        </p:spPr>
+        <p:txBody>
+          <a:bodyPr rtlCol="0" anchor="ctr" wrap="square" lIns="54864" rIns="54864" tIns="27432" bIns="27432">
+            <a:noAutofit/>
+          </a:bodyPr>
+          <a:lstStyle/>
+          <a:p>
+            <a:pPr algn="ctr">
+              <a:lnSpc>
+                <a:spcPct val="100000"/>
+              </a:lnSpc>
+            </a:pPr>
+            <a:r>
+              <a:rPr sz="1400" b="0" i="0">
+                <a:solidFill>
+                  <a:srgbClr val="49273F"/>
+                </a:solidFill>
+              </a:rPr>
+              <a:t>사진을 넣어 주세요</a:t>
+            </a:r>
+          </a:p>
+        </p:txBody>
+      </p:sp>
+      <p:sp>
+        <p:nvSpPr>
+          <p:cNvPr id="4" name="장식"/>
+          <p:cNvSpPr/>
+          <p:nvPr/>
+        </p:nvSpPr>
+        <p:spPr>
+          <a:xfrm>
+            <a:off x="6827349" y="4251960"/>
+            <a:ext cx="1005840" cy="1005840"/>
+          </a:xfrm>
+          <a:prstGeom prst="ellipse">
+            <a:avLst/>
+          </a:prstGeom>
+          <a:solidFill>
+            <a:srgbClr val="F2A6DB"/>
+          </a:solidFill>
+          <a:ln>
+            <a:noFill/>
+          </a:ln>
+        </p:spPr>
+        <p:txBody>
+          <a:bodyPr rtlCol="0" anchor="ctr"/>
+          <a:lstStyle/>
+          <a:p>
+            <a:pPr algn="ctr"/>
+          </a:p>
+        </p:txBody>
+      </p:sp>
+      <p:sp>
+        <p:nvSpPr>
+          <p:cNvPr id="5" name="라벨"/>
+          <p:cNvSpPr txBox="1"/>
+          <p:nvPr/>
+        </p:nvSpPr>
+        <p:spPr>
+          <a:xfrm>
+            <a:off x="822960" y="2148840"/>
+            <a:ext cx="5608179" cy="274320"/>
           </a:xfrm>
           <a:prstGeom prst="rect">
             <a:avLst/>
           </a:prstGeom>
-        </p:spPr>
-      </p:pic>
+          <a:noFill/>
+        </p:spPr>
+        <p:txBody>
+          <a:bodyPr wrap="square" lIns="54864" rIns="54864" tIns="27432" bIns="27432" anchor="t">
+            <a:noAutofit/>
+          </a:bodyPr>
+          <a:lstStyle/>
+          <a:p>
+            <a:pPr algn="l">
+              <a:lnSpc>
+                <a:spcPct val="115000"/>
+              </a:lnSpc>
+            </a:pPr>
+            <a:r>
+              <a:rPr sz="1000" b="1" i="0" spc="250">
+                <a:solidFill>
+                  <a:srgbClr val="26231F"/>
+                </a:solidFill>
+              </a:rPr>
+              <a:t>FAMILY ALBUM</a:t>
+            </a:r>
+          </a:p>
+        </p:txBody>
+      </p:sp>
       <p:sp>
         <p:nvSpPr>
           <p:cNvPr id="2" name="Title 1"/>
@@ -5934,8 +6239,8 @@
         </p:nvSpPr>
         <p:spPr>
           <a:xfrm>
-            <a:off x="853418" y="2057400"/>
-            <a:ext cx="6095847" cy="1554480"/>
+            <a:off x="822960" y="2606040"/>
+            <a:ext cx="5608179" cy="1188720"/>
           </a:xfrm>
         </p:spPr>
         <p:txBody>
@@ -5950,9 +6255,9 @@
               </a:lnSpc>
             </a:pPr>
             <a:r>
-              <a:rPr sz="3600" b="1" i="0">
-                <a:solidFill>
-                  <a:srgbClr val="721D59"/>
+              <a:rPr sz="4000" b="1" i="0">
+                <a:solidFill>
+                  <a:srgbClr val="26231F"/>
                 </a:solidFill>
               </a:rPr>
               <a:t>우리 가족 소개를 마칩니다</a:t>
@@ -5962,14 +6267,14 @@
       </p:sp>
       <p:sp>
         <p:nvSpPr>
-          <p:cNvPr id="4" name="한 줄 문구"/>
+          <p:cNvPr id="6" name="한 줄 문구"/>
           <p:cNvSpPr txBox="1"/>
           <p:nvPr/>
         </p:nvSpPr>
         <p:spPr>
           <a:xfrm>
-            <a:off x="853418" y="3749039"/>
-            <a:ext cx="6095847" cy="822960"/>
+            <a:off x="822960" y="3886200"/>
+            <a:ext cx="5608179" cy="822960"/>
           </a:xfrm>
           <a:prstGeom prst="rect">
             <a:avLst/>
@@ -5988,9 +6293,9 @@
               </a:lnSpc>
             </a:pPr>
             <a:r>
-              <a:rPr sz="1700" b="0" i="1">
-                <a:solidFill>
-                  <a:srgbClr val="721D59"/>
+              <a:rPr sz="1700" b="0" i="0">
+                <a:solidFill>
+                  <a:srgbClr val="26231F"/>
                 </a:solidFill>
               </a:rPr>
               <a:t>읽어 주셔서 고맙습니다</a:t>
@@ -6000,14 +6305,14 @@
       </p:sp>
       <p:sp>
         <p:nvSpPr>
-          <p:cNvPr id="5" name="안내 문구"/>
+          <p:cNvPr id="7" name="안내 문구"/>
           <p:cNvSpPr txBox="1"/>
           <p:nvPr/>
         </p:nvSpPr>
         <p:spPr>
           <a:xfrm>
-            <a:off x="853418" y="4617720"/>
-            <a:ext cx="6095847" cy="914400"/>
+            <a:off x="822960" y="4754880"/>
+            <a:ext cx="5608179" cy="914400"/>
           </a:xfrm>
           <a:prstGeom prst="rect">
             <a:avLst/>
@@ -6028,7 +6333,7 @@
             <a:r>
               <a:rPr sz="1400" b="0" i="0">
                 <a:solidFill>
-                  <a:srgbClr val="666666"/>
+                  <a:srgbClr val="26231F"/>
                 </a:solidFill>
               </a:rPr>
               <a:t>고맙습니다 · 가족 이름</a:t>
@@ -6055,34 +6360,34 @@
         <a:sysClr val="window" lastClr="FFFFFF"/>
       </a:lt1>
       <a:dk2>
-        <a:srgbClr val="721D59"/>
+        <a:srgbClr val="49273F"/>
       </a:dk2>
       <a:lt2>
-        <a:srgbClr val="FCF3F9"/>
+        <a:srgbClr val="FDEAF7"/>
       </a:lt2>
       <a:accent1>
-        <a:srgbClr val="D345A9"/>
+        <a:srgbClr val="ED97D3"/>
       </a:accent1>
       <a:accent2>
-        <a:srgbClr val="339941"/>
+        <a:srgbClr val="F3BAC7"/>
       </a:accent2>
       <a:accent3>
-        <a:srgbClr val="721D59"/>
+        <a:srgbClr val="49273F"/>
       </a:accent3>
       <a:accent4>
-        <a:srgbClr val="F7D4ED"/>
+        <a:srgbClr val="FAD1EE"/>
       </a:accent4>
       <a:accent5>
-        <a:srgbClr val="836F75"/>
+        <a:srgbClr val="F0A8CD"/>
       </a:accent5>
       <a:accent6>
-        <a:srgbClr val="AA779B"/>
+        <a:srgbClr val="927D8C"/>
       </a:accent6>
       <a:hlink>
-        <a:srgbClr val="D345A9"/>
+        <a:srgbClr val="ED97D3"/>
       </a:hlink>
       <a:folHlink>
-        <a:srgbClr val="721D59"/>
+        <a:srgbClr val="49273F"/>
       </a:folHlink>
     </a:clrScheme>
     <a:fontScheme name="Office">
